--- a/CLASES/CLASE 03/Clase03_Unidad1_Abstraccion_Objetos_Herencia_Historia_Python.pptx
+++ b/CLASES/CLASE 03/Clase03_Unidad1_Abstraccion_Objetos_Herencia_Historia_Python.pptx
@@ -4,31 +4,31 @@
   <p:sldMasterIdLst>
     <p:sldMasterId id="2147483648" r:id="rId1"/>
   </p:sldMasterIdLst>
+  <p:notesMasterIdLst>
+    <p:notesMasterId r:id="rId22"/>
+  </p:notesMasterIdLst>
   <p:sldIdLst>
     <p:sldId id="256" r:id="rId2"/>
     <p:sldId id="257" r:id="rId3"/>
     <p:sldId id="258" r:id="rId4"/>
-    <p:sldId id="267" r:id="rId18"/>
-    <p:sldId id="268" r:id="rId19"/>
-    <p:sldId id="259" r:id="rId5"/>
-    <p:sldId id="269" r:id="rId20"/>
-    <p:sldId id="270" r:id="rId21"/>
-    <p:sldId id="262" r:id="rId8"/>
-    <p:sldId id="263" r:id="rId9"/>
-    <p:sldId id="260" r:id="rId6"/>
-    <p:sldId id="271" r:id="rId22"/>
-    <p:sldId id="272" r:id="rId23"/>
-    <p:sldId id="261" r:id="rId7"/>
-    <p:sldId id="273" r:id="rId24"/>
-    <p:sldId id="274" r:id="rId25"/>
-    <p:sldId id="264" r:id="rId10"/>
-    <p:sldId id="275" r:id="rId26"/>
-    <p:sldId id="265" r:id="rId11"/>
-    <p:sldId id="266" r:id="rId12"/>
+    <p:sldId id="267" r:id="rId5"/>
+    <p:sldId id="268" r:id="rId6"/>
+    <p:sldId id="259" r:id="rId7"/>
+    <p:sldId id="269" r:id="rId8"/>
+    <p:sldId id="270" r:id="rId9"/>
+    <p:sldId id="262" r:id="rId10"/>
+    <p:sldId id="263" r:id="rId11"/>
+    <p:sldId id="260" r:id="rId12"/>
+    <p:sldId id="271" r:id="rId13"/>
+    <p:sldId id="272" r:id="rId14"/>
+    <p:sldId id="261" r:id="rId15"/>
+    <p:sldId id="273" r:id="rId16"/>
+    <p:sldId id="274" r:id="rId17"/>
+    <p:sldId id="264" r:id="rId18"/>
+    <p:sldId id="275" r:id="rId19"/>
+    <p:sldId id="265" r:id="rId20"/>
+    <p:sldId id="266" r:id="rId21"/>
   </p:sldIdLst>
-  <p:notesMasterIdLst>
-    <p:notesMasterId r:id="rId13"/>
-  </p:notesMasterIdLst>
   <p:sldSz cx="12192000" cy="6858000"/>
   <p:notesSz cx="6858000" cy="12192000"/>
   <p:defaultTextStyle>
@@ -123,6 +123,11 @@
       </a:defRPr>
     </a:lvl9pPr>
   </p:defaultTextStyle>
+  <p:extLst>
+    <p:ext uri="{EFAFB233-063F-42B5-8137-9DF3F51BA10A}">
+      <p15:sldGuideLst xmlns:p15="http://schemas.microsoft.com/office/powerpoint/2012/main"/>
+    </p:ext>
+  </p:extLst>
 </p:presentation>
 </file>
 
@@ -148,234 +153,10 @@
           <a:chExt cx="0" cy="0"/>
         </a:xfrm>
       </p:grpSpPr>
-      <p:sp>
-        <p:nvSpPr>
-          <p:cNvPr id="2" name="Header Placeholder 1"/>
-          <p:cNvSpPr>
-            <a:spLocks noGrp="1"/>
-          </p:cNvSpPr>
-          <p:nvPr>
-            <p:ph type="hdr" sz="quarter"/>
-          </p:nvPr>
-        </p:nvSpPr>
-        <p:spPr>
-          <a:xfrm>
-            <a:off x="0" y="0"/>
-            <a:ext cx="2971800" cy="458788"/>
-          </a:xfrm>
-          <a:prstGeom prst="rect">
-            <a:avLst/>
-          </a:prstGeom>
-        </p:spPr>
-        <p:txBody>
-          <a:bodyPr vert="horz" lIns="91440" tIns="45720" rIns="91440" bIns="45720" rtlCol="0"/>
-          <a:lstStyle>
-            <a:lvl1pPr algn="l">
-              <a:defRPr sz="1200"/>
-            </a:lvl1pPr>
-          </a:lstStyle>
-          <a:p>
-            <a:endParaRPr lang="en-US"/>
-          </a:p>
-        </p:txBody>
-      </p:sp>
-      <p:sp>
-        <p:nvSpPr>
-          <p:cNvPr id="3" name="Date Placeholder 2"/>
-          <p:cNvSpPr>
-            <a:spLocks noGrp="1"/>
-          </p:cNvSpPr>
-          <p:nvPr>
-            <p:ph type="dt" idx="1"/>
-          </p:nvPr>
-        </p:nvSpPr>
-        <p:spPr>
-          <a:xfrm>
-            <a:off x="3884613" y="0"/>
-            <a:ext cx="2971800" cy="458788"/>
-          </a:xfrm>
-          <a:prstGeom prst="rect">
-            <a:avLst/>
-          </a:prstGeom>
-        </p:spPr>
-        <p:txBody>
-          <a:bodyPr vert="horz" lIns="91440" tIns="45720" rIns="91440" bIns="45720" rtlCol="0"/>
-          <a:lstStyle>
-            <a:lvl1pPr algn="r">
-              <a:defRPr sz="1200"/>
-            </a:lvl1pPr>
-          </a:lstStyle>
-          <a:p>
-            <a:fld id="{5282F153-3F37-0F45-9E97-73ACFA13230C}" type="datetimeFigureOut">
-              <a:rPr lang="en-US"/>
-              <a:t>7/23/19</a:t>
-            </a:fld>
-            <a:endParaRPr lang="en-US"/>
-          </a:p>
-        </p:txBody>
-      </p:sp>
-      <p:sp>
-        <p:nvSpPr>
-          <p:cNvPr id="4" name="Slide Image Placeholder 3"/>
-          <p:cNvSpPr>
-            <a:spLocks noGrp="1" noRot="1" noChangeAspect="1"/>
-          </p:cNvSpPr>
-          <p:nvPr>
-            <p:ph type="sldImg" idx="2"/>
-          </p:nvPr>
-        </p:nvSpPr>
-        <p:spPr>
-          <a:xfrm>
-            <a:off x="685800" y="1143000"/>
-            <a:ext cx="5486400" cy="3086100"/>
-          </a:xfrm>
-          <a:prstGeom prst="rect">
-            <a:avLst/>
-          </a:prstGeom>
-          <a:noFill/>
-          <a:ln w="12700">
-            <a:solidFill>
-              <a:prstClr val="black"/>
-            </a:solidFill>
-          </a:ln>
-        </p:spPr>
-        <p:txBody>
-          <a:bodyPr vert="horz" lIns="91440" tIns="45720" rIns="91440" bIns="45720" rtlCol="0" anchor="ctr"/>
-          <a:lstStyle/>
-          <a:p>
-            <a:endParaRPr lang="en-US"/>
-          </a:p>
-        </p:txBody>
-      </p:sp>
-      <p:sp>
-        <p:nvSpPr>
-          <p:cNvPr id="5" name="Notes Placeholder 4"/>
-          <p:cNvSpPr>
-            <a:spLocks noGrp="1"/>
-          </p:cNvSpPr>
-          <p:nvPr>
-            <p:ph type="body" sz="quarter" idx="3"/>
-          </p:nvPr>
-        </p:nvSpPr>
-        <p:spPr>
-          <a:xfrm>
-            <a:off x="685800" y="4400550"/>
-            <a:ext cx="5486400" cy="3600450"/>
-          </a:xfrm>
-          <a:prstGeom prst="rect">
-            <a:avLst/>
-          </a:prstGeom>
-        </p:spPr>
-        <p:txBody>
-          <a:bodyPr vert="horz" lIns="91440" tIns="45720" rIns="91440" bIns="45720" rtlCol="0"/>
-          <a:lstStyle/>
-          <a:p>
-            <a:pPr lvl="0"/>
-            <a:r>
-              <a:rPr lang="en-US"/>
-              <a:t>Click to edit Master text styles</a:t>
-            </a:r>
-          </a:p>
-          <a:p>
-            <a:pPr lvl="1"/>
-            <a:r>
-              <a:rPr lang="en-US"/>
-              <a:t>Second level</a:t>
-            </a:r>
-          </a:p>
-          <a:p>
-            <a:pPr lvl="2"/>
-            <a:r>
-              <a:rPr lang="en-US"/>
-              <a:t>Third level</a:t>
-            </a:r>
-          </a:p>
-          <a:p>
-            <a:pPr lvl="3"/>
-            <a:r>
-              <a:rPr lang="en-US"/>
-              <a:t>Fourth level</a:t>
-            </a:r>
-          </a:p>
-          <a:p>
-            <a:pPr lvl="4"/>
-            <a:r>
-              <a:rPr lang="en-US"/>
-              <a:t>Fifth level</a:t>
-            </a:r>
-          </a:p>
-        </p:txBody>
-      </p:sp>
-      <p:sp>
-        <p:nvSpPr>
-          <p:cNvPr id="6" name="Footer Placeholder 5"/>
-          <p:cNvSpPr>
-            <a:spLocks noGrp="1"/>
-          </p:cNvSpPr>
-          <p:nvPr>
-            <p:ph type="ftr" sz="quarter" idx="4"/>
-          </p:nvPr>
-        </p:nvSpPr>
-        <p:spPr>
-          <a:xfrm>
-            <a:off x="0" y="8685213"/>
-            <a:ext cx="2971800" cy="458787"/>
-          </a:xfrm>
-          <a:prstGeom prst="rect">
-            <a:avLst/>
-          </a:prstGeom>
-        </p:spPr>
-        <p:txBody>
-          <a:bodyPr vert="horz" lIns="91440" tIns="45720" rIns="91440" bIns="45720" rtlCol="0" anchor="b"/>
-          <a:lstStyle>
-            <a:lvl1pPr algn="l">
-              <a:defRPr sz="1200"/>
-            </a:lvl1pPr>
-          </a:lstStyle>
-          <a:p>
-            <a:endParaRPr lang="en-US"/>
-          </a:p>
-        </p:txBody>
-      </p:sp>
-      <p:sp>
-        <p:nvSpPr>
-          <p:cNvPr id="7" name="Slide Number Placeholder 6"/>
-          <p:cNvSpPr>
-            <a:spLocks noGrp="1"/>
-          </p:cNvSpPr>
-          <p:nvPr>
-            <p:ph type="sldNum" sz="quarter" idx="5"/>
-          </p:nvPr>
-        </p:nvSpPr>
-        <p:spPr>
-          <a:xfrm>
-            <a:off x="3884613" y="8685213"/>
-            <a:ext cx="2971800" cy="458787"/>
-          </a:xfrm>
-          <a:prstGeom prst="rect">
-            <a:avLst/>
-          </a:prstGeom>
-        </p:spPr>
-        <p:txBody>
-          <a:bodyPr vert="horz" lIns="91440" tIns="45720" rIns="91440" bIns="45720" rtlCol="0" anchor="b"/>
-          <a:lstStyle>
-            <a:lvl1pPr algn="r">
-              <a:defRPr sz="1200"/>
-            </a:lvl1pPr>
-          </a:lstStyle>
-          <a:p>
-            <a:fld id="{CE5E9CC1-C706-0F49-92D6-E571CC5EEA8F}" type="slidenum">
-              <a:rPr lang="en-US"/>
-              <a:t>‹#›</a:t>
-            </a:fld>
-            <a:endParaRPr lang="en-US"/>
-          </a:p>
-        </p:txBody>
-      </p:sp>
     </p:spTree>
     <p:extLst>
       <p:ext uri="{BB962C8B-B14F-4D97-AF65-F5344CB8AC3E}">
-        <p14:creationId xmlns:p14="http://schemas.microsoft.com/office/powerpoint/2010/main" val="1024086991"/>
+        <p14:creationId xmlns:p14="http://schemas.microsoft.com/office/powerpoint/2010/main" val="2828552815"/>
       </p:ext>
     </p:extLst>
   </p:cSld>
@@ -519,10 +300,6 @@
           <a:bodyPr/>
           <a:lstStyle/>
           <a:p>
-            <a:r>
-              <a:rPr lang="en-US" dirty="0"/>
-              <a:t/>
-            </a:r>
             <a:endParaRPr lang="en-US" dirty="0"/>
           </a:p>
         </p:txBody>
@@ -607,10 +384,6 @@
           <a:bodyPr/>
           <a:lstStyle/>
           <a:p>
-            <a:r>
-              <a:rPr lang="en-US" dirty="0"/>
-              <a:t/>
-            </a:r>
             <a:endParaRPr lang="en-US" dirty="0"/>
           </a:p>
         </p:txBody>
@@ -632,7 +405,7 @@
           <a:p>
             <a:fld id="{F7021451-1387-4CA6-816F-3879F97B5CBC}" type="slidenum">
               <a:rPr lang="en-US"/>
-              <a:t>10</a:t>
+              <a:t>19</a:t>
             </a:fld>
             <a:endParaRPr lang="en-US"/>
           </a:p>
@@ -695,10 +468,6 @@
           <a:bodyPr/>
           <a:lstStyle/>
           <a:p>
-            <a:r>
-              <a:rPr lang="en-US" dirty="0"/>
-              <a:t/>
-            </a:r>
             <a:endParaRPr lang="en-US" dirty="0"/>
           </a:p>
         </p:txBody>
@@ -720,7 +489,7 @@
           <a:p>
             <a:fld id="{F7021451-1387-4CA6-816F-3879F97B5CBC}" type="slidenum">
               <a:rPr lang="en-US"/>
-              <a:t>11</a:t>
+              <a:t>20</a:t>
             </a:fld>
             <a:endParaRPr lang="en-US"/>
           </a:p>
@@ -783,10 +552,6 @@
           <a:bodyPr/>
           <a:lstStyle/>
           <a:p>
-            <a:r>
-              <a:rPr lang="en-US" dirty="0"/>
-              <a:t/>
-            </a:r>
             <a:endParaRPr lang="en-US" dirty="0"/>
           </a:p>
         </p:txBody>
@@ -871,10 +636,6 @@
           <a:bodyPr/>
           <a:lstStyle/>
           <a:p>
-            <a:r>
-              <a:rPr lang="en-US" dirty="0"/>
-              <a:t/>
-            </a:r>
             <a:endParaRPr lang="en-US" dirty="0"/>
           </a:p>
         </p:txBody>
@@ -959,10 +720,6 @@
           <a:bodyPr/>
           <a:lstStyle/>
           <a:p>
-            <a:r>
-              <a:rPr lang="en-US" dirty="0"/>
-              <a:t/>
-            </a:r>
             <a:endParaRPr lang="en-US" dirty="0"/>
           </a:p>
         </p:txBody>
@@ -984,7 +741,7 @@
           <a:p>
             <a:fld id="{F7021451-1387-4CA6-816F-3879F97B5CBC}" type="slidenum">
               <a:rPr lang="en-US"/>
-              <a:t>4</a:t>
+              <a:t>6</a:t>
             </a:fld>
             <a:endParaRPr lang="en-US"/>
           </a:p>
@@ -1047,10 +804,6 @@
           <a:bodyPr/>
           <a:lstStyle/>
           <a:p>
-            <a:r>
-              <a:rPr lang="en-US" dirty="0"/>
-              <a:t/>
-            </a:r>
             <a:endParaRPr lang="en-US" dirty="0"/>
           </a:p>
         </p:txBody>
@@ -1072,7 +825,7 @@
           <a:p>
             <a:fld id="{F7021451-1387-4CA6-816F-3879F97B5CBC}" type="slidenum">
               <a:rPr lang="en-US"/>
-              <a:t>5</a:t>
+              <a:t>9</a:t>
             </a:fld>
             <a:endParaRPr lang="en-US"/>
           </a:p>
@@ -1135,10 +888,6 @@
           <a:bodyPr/>
           <a:lstStyle/>
           <a:p>
-            <a:r>
-              <a:rPr lang="en-US" dirty="0"/>
-              <a:t/>
-            </a:r>
             <a:endParaRPr lang="en-US" dirty="0"/>
           </a:p>
         </p:txBody>
@@ -1160,7 +909,7 @@
           <a:p>
             <a:fld id="{F7021451-1387-4CA6-816F-3879F97B5CBC}" type="slidenum">
               <a:rPr lang="en-US"/>
-              <a:t>6</a:t>
+              <a:t>10</a:t>
             </a:fld>
             <a:endParaRPr lang="en-US"/>
           </a:p>
@@ -1223,10 +972,6 @@
           <a:bodyPr/>
           <a:lstStyle/>
           <a:p>
-            <a:r>
-              <a:rPr lang="en-US" dirty="0"/>
-              <a:t/>
-            </a:r>
             <a:endParaRPr lang="en-US" dirty="0"/>
           </a:p>
         </p:txBody>
@@ -1248,7 +993,7 @@
           <a:p>
             <a:fld id="{F7021451-1387-4CA6-816F-3879F97B5CBC}" type="slidenum">
               <a:rPr lang="en-US"/>
-              <a:t>7</a:t>
+              <a:t>11</a:t>
             </a:fld>
             <a:endParaRPr lang="en-US"/>
           </a:p>
@@ -1311,10 +1056,6 @@
           <a:bodyPr/>
           <a:lstStyle/>
           <a:p>
-            <a:r>
-              <a:rPr lang="en-US" dirty="0"/>
-              <a:t/>
-            </a:r>
             <a:endParaRPr lang="en-US" dirty="0"/>
           </a:p>
         </p:txBody>
@@ -1336,7 +1077,7 @@
           <a:p>
             <a:fld id="{F7021451-1387-4CA6-816F-3879F97B5CBC}" type="slidenum">
               <a:rPr lang="en-US"/>
-              <a:t>8</a:t>
+              <a:t>14</a:t>
             </a:fld>
             <a:endParaRPr lang="en-US"/>
           </a:p>
@@ -1399,10 +1140,6 @@
           <a:bodyPr/>
           <a:lstStyle/>
           <a:p>
-            <a:r>
-              <a:rPr lang="en-US" dirty="0"/>
-              <a:t/>
-            </a:r>
             <a:endParaRPr lang="en-US" dirty="0"/>
           </a:p>
         </p:txBody>
@@ -1424,7 +1161,7 @@
           <a:p>
             <a:fld id="{F7021451-1387-4CA6-816F-3879F97B5CBC}" type="slidenum">
               <a:rPr lang="en-US"/>
-              <a:t>9</a:t>
+              <a:t>17</a:t>
             </a:fld>
             <a:endParaRPr lang="en-US"/>
           </a:p>
@@ -1476,6 +1213,11 @@
 <file path=ppt/slideMasters/slideMaster1.xml><?xml version="1.0" encoding="utf-8"?>
 <p:sldMaster xmlns:a="http://schemas.openxmlformats.org/drawingml/2006/main" xmlns:r="http://schemas.openxmlformats.org/officeDocument/2006/relationships" xmlns:p="http://schemas.openxmlformats.org/presentationml/2006/main">
   <p:cSld>
+    <p:bg>
+      <p:bgRef idx="1001">
+        <a:schemeClr val="bg1"/>
+      </p:bgRef>
+    </p:bg>
     <p:spTree>
       <p:nvGrpSpPr>
         <p:cNvPr id="1" name=""/>
@@ -1758,6 +1500,7 @@
         <a:solidFill>
           <a:srgbClr val="16233F"/>
         </a:solidFill>
+        <a:effectLst/>
       </p:bgPr>
     </p:bg>
     <p:spTree>
@@ -1795,7 +1538,10 @@
         </p:spPr>
         <p:txBody>
           <a:bodyPr/>
-          <a:p/>
+          <a:lstStyle/>
+          <a:p>
+            <a:endParaRPr/>
+          </a:p>
         </p:txBody>
       </p:sp>
       <p:sp>
@@ -1819,7 +1565,10 @@
         </p:spPr>
         <p:txBody>
           <a:bodyPr/>
-          <a:p/>
+          <a:lstStyle/>
+          <a:p>
+            <a:endParaRPr/>
+          </a:p>
         </p:txBody>
       </p:sp>
       <p:sp>
@@ -1843,7 +1592,10 @@
         </p:spPr>
         <p:txBody>
           <a:bodyPr/>
-          <a:p/>
+          <a:lstStyle/>
+          <a:p>
+            <a:endParaRPr/>
+          </a:p>
         </p:txBody>
       </p:sp>
       <p:sp>
@@ -1867,11 +1619,11 @@
           <a:bodyPr wrap="square" rtlCol="0" anchor="ctr"/>
           <a:lstStyle/>
           <a:p>
-            <a:pPr indent="0" marL="0">
-              <a:buNone/>
-            </a:pPr>
-            <a:r>
-              <a:rPr lang="en-US" sz="1300" b="1" spc="200" kern="0" dirty="0">
+            <a:pPr marL="0" indent="0">
+              <a:buNone/>
+            </a:pPr>
+            <a:r>
+              <a:rPr lang="en-US" sz="1300" b="1" kern="0" spc="200" dirty="0">
                 <a:solidFill>
                   <a:srgbClr val="C9A24B"/>
                 </a:solidFill>
@@ -1906,7 +1658,7 @@
           <a:bodyPr wrap="square" rtlCol="0" anchor="ctr"/>
           <a:lstStyle/>
           <a:p>
-            <a:pPr indent="0" marL="0">
+            <a:pPr marL="0" indent="0">
               <a:buNone/>
             </a:pPr>
             <a:r>
@@ -1945,7 +1697,7 @@
           <a:bodyPr wrap="square" rtlCol="0" anchor="t"/>
           <a:lstStyle/>
           <a:p>
-            <a:pPr indent="0" marL="0">
+            <a:pPr marL="0" indent="0">
               <a:buNone/>
             </a:pPr>
             <a:r>
@@ -1962,7 +1714,7 @@
             <a:endParaRPr lang="en-US" sz="1900" dirty="0"/>
           </a:p>
           <a:p>
-            <a:pPr indent="0" marL="0">
+            <a:pPr marL="0" indent="0">
               <a:buNone/>
             </a:pPr>
             <a:r>
@@ -2008,7 +1760,10 @@
         </p:spPr>
         <p:txBody>
           <a:bodyPr/>
-          <a:p/>
+          <a:lstStyle/>
+          <a:p>
+            <a:endParaRPr/>
+          </a:p>
         </p:txBody>
       </p:sp>
       <p:sp>
@@ -2032,7 +1787,7 @@
           <a:bodyPr wrap="square" rtlCol="0" anchor="ctr"/>
           <a:lstStyle/>
           <a:p>
-            <a:pPr algn="ctr" indent="0" marL="0">
+            <a:pPr marL="0" indent="0" algn="ctr">
               <a:buNone/>
             </a:pPr>
             <a:r>
@@ -2078,7 +1833,10 @@
         </p:spPr>
         <p:txBody>
           <a:bodyPr/>
-          <a:p/>
+          <a:lstStyle/>
+          <a:p>
+            <a:endParaRPr/>
+          </a:p>
         </p:txBody>
       </p:sp>
       <p:sp>
@@ -2102,7 +1860,7 @@
           <a:bodyPr wrap="square" rtlCol="0" anchor="ctr"/>
           <a:lstStyle/>
           <a:p>
-            <a:pPr algn="ctr" indent="0" marL="0">
+            <a:pPr marL="0" indent="0" algn="ctr">
               <a:buNone/>
             </a:pPr>
             <a:r>
@@ -2148,7 +1906,10 @@
         </p:spPr>
         <p:txBody>
           <a:bodyPr/>
-          <a:p/>
+          <a:lstStyle/>
+          <a:p>
+            <a:endParaRPr/>
+          </a:p>
         </p:txBody>
       </p:sp>
       <p:sp>
@@ -2172,7 +1933,7 @@
           <a:bodyPr wrap="square" rtlCol="0" anchor="ctr"/>
           <a:lstStyle/>
           <a:p>
-            <a:pPr algn="ctr" indent="0" marL="0">
+            <a:pPr marL="0" indent="0" algn="ctr">
               <a:buNone/>
             </a:pPr>
             <a:r>
@@ -2211,7 +1972,7 @@
           <a:bodyPr wrap="square" rtlCol="0" anchor="ctr"/>
           <a:lstStyle/>
           <a:p>
-            <a:pPr indent="0" marL="0">
+            <a:pPr marL="0" indent="0">
               <a:buNone/>
             </a:pPr>
             <a:r>
@@ -2250,7 +2011,7 @@
           <a:bodyPr wrap="square" rtlCol="0" anchor="ctr"/>
           <a:lstStyle/>
           <a:p>
-            <a:pPr algn="r" indent="0" marL="0">
+            <a:pPr marL="0" indent="0" algn="r">
               <a:buNone/>
             </a:pPr>
             <a:r>
@@ -2284,6 +2045,7 @@
         <a:solidFill>
           <a:srgbClr val="FFFFFF"/>
         </a:solidFill>
+        <a:effectLst/>
       </p:bgPr>
     </p:bg>
     <p:spTree>
@@ -2321,7 +2083,7 @@
           <a:bodyPr wrap="square" rtlCol="0" anchor="ctr"/>
           <a:lstStyle/>
           <a:p>
-            <a:pPr indent="0" marL="0">
+            <a:pPr marL="0" indent="0">
               <a:buNone/>
             </a:pPr>
             <a:r>
@@ -2360,7 +2122,7 @@
           <a:bodyPr wrap="square" rtlCol="0" anchor="ctr"/>
           <a:lstStyle/>
           <a:p>
-            <a:pPr algn="r" indent="0" marL="0">
+            <a:pPr marL="0" indent="0" algn="r">
               <a:buNone/>
             </a:pPr>
             <a:r>
@@ -2399,11 +2161,11 @@
           <a:bodyPr wrap="square" rtlCol="0" anchor="ctr"/>
           <a:lstStyle/>
           <a:p>
-            <a:pPr indent="0" marL="0">
-              <a:buNone/>
-            </a:pPr>
-            <a:r>
-              <a:rPr lang="en-US" sz="1300" b="1" spc="200" kern="0" dirty="0">
+            <a:pPr marL="0" indent="0">
+              <a:buNone/>
+            </a:pPr>
+            <a:r>
+              <a:rPr lang="en-US" sz="1300" b="1" kern="0" spc="200" dirty="0">
                 <a:solidFill>
                   <a:srgbClr val="C9A24B"/>
                 </a:solidFill>
@@ -2438,7 +2200,7 @@
           <a:bodyPr wrap="square" rtlCol="0" anchor="ctr"/>
           <a:lstStyle/>
           <a:p>
-            <a:pPr indent="0" marL="0">
+            <a:pPr marL="0" indent="0">
               <a:buNone/>
             </a:pPr>
             <a:r>
@@ -2484,7 +2246,10 @@
         </p:spPr>
         <p:txBody>
           <a:bodyPr/>
-          <a:p/>
+          <a:lstStyle/>
+          <a:p>
+            <a:endParaRPr/>
+          </a:p>
         </p:txBody>
       </p:sp>
       <p:sp>
@@ -2508,11 +2273,11 @@
           <a:bodyPr wrap="square" rtlCol="0" anchor="ctr"/>
           <a:lstStyle/>
           <a:p>
-            <a:pPr indent="0" marL="0">
-              <a:buNone/>
-            </a:pPr>
-            <a:r>
-              <a:rPr lang="en-US" sz="1050" b="1" spc="100" kern="0" dirty="0">
+            <a:pPr marL="0" indent="0">
+              <a:buNone/>
+            </a:pPr>
+            <a:r>
+              <a:rPr lang="en-US" sz="1050" b="1" kern="0" spc="100" dirty="0">
                 <a:solidFill>
                   <a:srgbClr val="2E7D5B"/>
                 </a:solidFill>
@@ -2547,7 +2312,7 @@
           <a:bodyPr wrap="square" rtlCol="0" anchor="t"/>
           <a:lstStyle/>
           <a:p>
-            <a:pPr indent="0" marL="0">
+            <a:pPr marL="0" indent="0">
               <a:buNone/>
             </a:pPr>
             <a:r>
@@ -2586,7 +2351,10 @@
         </p:spPr>
         <p:txBody>
           <a:bodyPr/>
-          <a:p/>
+          <a:lstStyle/>
+          <a:p>
+            <a:endParaRPr/>
+          </a:p>
         </p:txBody>
       </p:sp>
       <p:sp>
@@ -2610,7 +2378,7 @@
           <a:bodyPr wrap="square" rtlCol="0" anchor="t"/>
           <a:lstStyle/>
           <a:p>
-            <a:pPr indent="0" marL="0">
+            <a:pPr marL="0" indent="0">
               <a:buNone/>
             </a:pPr>
             <a:r>
@@ -2649,7 +2417,10 @@
         </p:spPr>
         <p:txBody>
           <a:bodyPr/>
-          <a:p/>
+          <a:lstStyle/>
+          <a:p>
+            <a:endParaRPr/>
+          </a:p>
         </p:txBody>
       </p:sp>
       <p:sp>
@@ -2673,7 +2444,7 @@
           <a:bodyPr wrap="square" rtlCol="0" anchor="t"/>
           <a:lstStyle/>
           <a:p>
-            <a:pPr indent="0" marL="0">
+            <a:pPr marL="0" indent="0">
               <a:buNone/>
             </a:pPr>
             <a:r>
@@ -2712,7 +2483,10 @@
         </p:spPr>
         <p:txBody>
           <a:bodyPr/>
-          <a:p/>
+          <a:lstStyle/>
+          <a:p>
+            <a:endParaRPr/>
+          </a:p>
         </p:txBody>
       </p:sp>
       <p:sp>
@@ -2736,7 +2510,7 @@
           <a:bodyPr wrap="square" rtlCol="0" anchor="t"/>
           <a:lstStyle/>
           <a:p>
-            <a:pPr indent="0" marL="0">
+            <a:pPr marL="0" indent="0">
               <a:buNone/>
             </a:pPr>
             <a:r>
@@ -2775,7 +2549,7 @@
           <a:bodyPr wrap="square" rtlCol="0" anchor="ctr"/>
           <a:lstStyle/>
           <a:p>
-            <a:pPr indent="0" marL="0">
+            <a:pPr marL="0" indent="0">
               <a:buNone/>
             </a:pPr>
             <a:r>
@@ -2809,6 +2583,7 @@
         <a:solidFill>
           <a:srgbClr val="FFFFFF"/>
         </a:solidFill>
+        <a:effectLst/>
       </p:bgPr>
     </p:bg>
     <p:spTree>
@@ -2846,7 +2621,7 @@
           <a:bodyPr wrap="square" rtlCol="0" anchor="ctr"/>
           <a:lstStyle/>
           <a:p>
-            <a:pPr indent="0" marL="0">
+            <a:pPr marL="0" indent="0">
               <a:buNone/>
             </a:pPr>
             <a:r>
@@ -2885,7 +2660,7 @@
           <a:bodyPr wrap="square" rtlCol="0" anchor="ctr"/>
           <a:lstStyle/>
           <a:p>
-            <a:pPr algn="r" indent="0" marL="0">
+            <a:pPr marL="0" indent="0" algn="r">
               <a:buNone/>
             </a:pPr>
             <a:r>
@@ -2924,11 +2699,11 @@
           <a:bodyPr wrap="square" rtlCol="0" anchor="ctr"/>
           <a:lstStyle/>
           <a:p>
-            <a:pPr indent="0" marL="0">
-              <a:buNone/>
-            </a:pPr>
-            <a:r>
-              <a:rPr lang="en-US" sz="1300" b="1" spc="200" kern="0" dirty="0">
+            <a:pPr marL="0" indent="0">
+              <a:buNone/>
+            </a:pPr>
+            <a:r>
+              <a:rPr lang="en-US" sz="1300" b="1" kern="0" spc="200" dirty="0">
                 <a:solidFill>
                   <a:srgbClr val="C9A24B"/>
                 </a:solidFill>
@@ -2963,7 +2738,7 @@
           <a:bodyPr wrap="square" rtlCol="0" anchor="ctr"/>
           <a:lstStyle/>
           <a:p>
-            <a:pPr indent="0" marL="0">
+            <a:pPr marL="0" indent="0">
               <a:buNone/>
             </a:pPr>
             <a:r>
@@ -3002,7 +2777,7 @@
           <a:bodyPr wrap="square" rtlCol="0" anchor="t"/>
           <a:lstStyle/>
           <a:p>
-            <a:pPr indent="0" marL="0">
+            <a:pPr marL="0" indent="0">
               <a:lnSpc>
                 <a:spcPct val="125000"/>
               </a:lnSpc>
@@ -3044,7 +2819,10 @@
         </p:spPr>
         <p:txBody>
           <a:bodyPr/>
-          <a:p/>
+          <a:lstStyle/>
+          <a:p>
+            <a:endParaRPr/>
+          </a:p>
         </p:txBody>
       </p:sp>
       <p:sp>
@@ -3068,7 +2846,7 @@
           <a:bodyPr wrap="square" rtlCol="0" anchor="t"/>
           <a:lstStyle/>
           <a:p>
-            <a:pPr indent="0" marL="0">
+            <a:pPr marL="0" indent="0">
               <a:buNone/>
             </a:pPr>
             <a:r>
@@ -3107,7 +2885,10 @@
         </p:spPr>
         <p:txBody>
           <a:bodyPr/>
-          <a:p/>
+          <a:lstStyle/>
+          <a:p>
+            <a:endParaRPr/>
+          </a:p>
         </p:txBody>
       </p:sp>
       <p:sp>
@@ -3131,7 +2912,7 @@
           <a:bodyPr wrap="square" rtlCol="0" anchor="t"/>
           <a:lstStyle/>
           <a:p>
-            <a:pPr indent="0" marL="0">
+            <a:pPr marL="0" indent="0">
               <a:buNone/>
             </a:pPr>
             <a:r>
@@ -3170,7 +2951,10 @@
         </p:spPr>
         <p:txBody>
           <a:bodyPr/>
-          <a:p/>
+          <a:lstStyle/>
+          <a:p>
+            <a:endParaRPr/>
+          </a:p>
         </p:txBody>
       </p:sp>
       <p:sp>
@@ -3194,7 +2978,7 @@
           <a:bodyPr wrap="square" rtlCol="0" anchor="t"/>
           <a:lstStyle/>
           <a:p>
-            <a:pPr indent="0" marL="0">
+            <a:pPr marL="0" indent="0">
               <a:buNone/>
             </a:pPr>
             <a:r>
@@ -3235,7 +3019,10 @@
         </p:spPr>
         <p:txBody>
           <a:bodyPr/>
-          <a:p/>
+          <a:lstStyle/>
+          <a:p>
+            <a:endParaRPr/>
+          </a:p>
         </p:txBody>
       </p:sp>
       <p:sp>
@@ -3259,7 +3046,7 @@
           <a:bodyPr wrap="square" rtlCol="0" anchor="ctr"/>
           <a:lstStyle/>
           <a:p>
-            <a:pPr indent="0" marL="0">
+            <a:pPr marL="0" indent="0">
               <a:buNone/>
             </a:pPr>
             <a:r>
@@ -3298,7 +3085,7 @@
           <a:bodyPr wrap="square" rtlCol="0" anchor="t"/>
           <a:lstStyle/>
           <a:p>
-            <a:pPr indent="0" marL="0">
+            <a:pPr marL="0" indent="0">
               <a:lnSpc>
                 <a:spcPct val="130000"/>
               </a:lnSpc>
@@ -3318,7 +3105,7 @@
             <a:endParaRPr lang="en-US" sz="1200" dirty="0"/>
           </a:p>
           <a:p>
-            <a:pPr indent="0" marL="0">
+            <a:pPr marL="0" indent="0">
               <a:lnSpc>
                 <a:spcPct val="130000"/>
               </a:lnSpc>
@@ -3338,7 +3125,7 @@
             <a:endParaRPr lang="en-US" sz="1200" dirty="0"/>
           </a:p>
           <a:p>
-            <a:pPr indent="0" marL="0">
+            <a:pPr marL="0" indent="0">
               <a:lnSpc>
                 <a:spcPct val="130000"/>
               </a:lnSpc>
@@ -3358,7 +3145,7 @@
             <a:endParaRPr lang="en-US" sz="1200" dirty="0"/>
           </a:p>
           <a:p>
-            <a:pPr indent="0" marL="0">
+            <a:pPr marL="0" indent="0">
               <a:lnSpc>
                 <a:spcPct val="130000"/>
               </a:lnSpc>
@@ -3367,7 +3154,7 @@
             <a:endParaRPr lang="en-US" sz="1200" dirty="0"/>
           </a:p>
           <a:p>
-            <a:pPr indent="0" marL="0">
+            <a:pPr marL="0" indent="0">
               <a:lnSpc>
                 <a:spcPct val="130000"/>
               </a:lnSpc>
@@ -3387,7 +3174,7 @@
             <a:endParaRPr lang="en-US" sz="1200" dirty="0"/>
           </a:p>
           <a:p>
-            <a:pPr indent="0" marL="0">
+            <a:pPr marL="0" indent="0">
               <a:lnSpc>
                 <a:spcPct val="130000"/>
               </a:lnSpc>
@@ -3396,7 +3183,7 @@
             <a:endParaRPr lang="en-US" sz="1200" dirty="0"/>
           </a:p>
           <a:p>
-            <a:pPr indent="0" marL="0">
+            <a:pPr marL="0" indent="0">
               <a:lnSpc>
                 <a:spcPct val="130000"/>
               </a:lnSpc>
@@ -3416,7 +3203,7 @@
             <a:endParaRPr lang="en-US" sz="1200" dirty="0"/>
           </a:p>
           <a:p>
-            <a:pPr indent="0" marL="0">
+            <a:pPr marL="0" indent="0">
               <a:lnSpc>
                 <a:spcPct val="130000"/>
               </a:lnSpc>
@@ -3436,7 +3223,7 @@
             <a:endParaRPr lang="en-US" sz="1200" dirty="0"/>
           </a:p>
           <a:p>
-            <a:pPr indent="0" marL="0">
+            <a:pPr marL="0" indent="0">
               <a:lnSpc>
                 <a:spcPct val="130000"/>
               </a:lnSpc>
@@ -3445,7 +3232,7 @@
             <a:endParaRPr lang="en-US" sz="1200" dirty="0"/>
           </a:p>
           <a:p>
-            <a:pPr indent="0" marL="0">
+            <a:pPr marL="0" indent="0">
               <a:lnSpc>
                 <a:spcPct val="130000"/>
               </a:lnSpc>
@@ -3465,7 +3252,7 @@
             <a:endParaRPr lang="en-US" sz="1200" dirty="0"/>
           </a:p>
           <a:p>
-            <a:pPr indent="0" marL="0">
+            <a:pPr marL="0" indent="0">
               <a:lnSpc>
                 <a:spcPct val="130000"/>
               </a:lnSpc>
@@ -3526,6 +3313,7 @@
         <a:solidFill>
           <a:srgbClr val="FFFFFF"/>
         </a:solidFill>
+        <a:effectLst/>
       </p:bgPr>
     </p:bg>
     <p:spTree>
@@ -3563,7 +3351,7 @@
           <a:bodyPr wrap="square" rtlCol="0" anchor="ctr"/>
           <a:lstStyle/>
           <a:p>
-            <a:pPr indent="0" marL="0">
+            <a:pPr marL="0" indent="0">
               <a:buNone/>
             </a:pPr>
             <a:r>
@@ -3602,7 +3390,7 @@
           <a:bodyPr wrap="square" rtlCol="0" anchor="ctr"/>
           <a:lstStyle/>
           <a:p>
-            <a:pPr algn="r" indent="0" marL="0">
+            <a:pPr marL="0" indent="0" algn="r">
               <a:buNone/>
             </a:pPr>
             <a:r>
@@ -3641,11 +3429,11 @@
           <a:bodyPr wrap="square" rtlCol="0" anchor="ctr"/>
           <a:lstStyle/>
           <a:p>
-            <a:pPr indent="0" marL="0">
-              <a:buNone/>
-            </a:pPr>
-            <a:r>
-              <a:rPr lang="en-US" sz="1300" b="1" spc="200" kern="0" dirty="0">
+            <a:pPr marL="0" indent="0">
+              <a:buNone/>
+            </a:pPr>
+            <a:r>
+              <a:rPr lang="en-US" sz="1300" b="1" kern="0" spc="200" dirty="0">
                 <a:solidFill>
                   <a:srgbClr val="C9A24B"/>
                 </a:solidFill>
@@ -3680,7 +3468,7 @@
           <a:bodyPr wrap="square" rtlCol="0" anchor="ctr"/>
           <a:lstStyle/>
           <a:p>
-            <a:pPr indent="0" marL="0">
+            <a:pPr marL="0" indent="0">
               <a:buNone/>
             </a:pPr>
             <a:r>
@@ -3804,6 +3592,7 @@
           <a:lstStyle/>
           <a:p>
             <a:pPr algn="ctr"/>
+            <a:endParaRPr/>
           </a:p>
         </p:txBody>
       </p:sp>
@@ -3885,6 +3674,7 @@
           <a:lstStyle/>
           <a:p>
             <a:pPr algn="ctr"/>
+            <a:endParaRPr/>
           </a:p>
         </p:txBody>
       </p:sp>
@@ -4038,6 +3828,7 @@
           <a:lstStyle/>
           <a:p>
             <a:pPr algn="ctr"/>
+            <a:endParaRPr/>
           </a:p>
         </p:txBody>
       </p:sp>
@@ -4156,8 +3947,8 @@
         </p:nvCxnSpPr>
         <p:spPr>
           <a:xfrm flipH="1">
-            <a:off x="2948940.0" y="3520440"/>
-            <a:ext cx="2052828.0" cy="822960"/>
+            <a:off x="0" y="3520440"/>
+            <a:ext cx="0" cy="822960"/>
           </a:xfrm>
           <a:prstGeom prst="line">
             <a:avLst/>
@@ -4193,7 +3984,7 @@
         <p:spPr>
           <a:xfrm>
             <a:off x="7196328" y="3520440"/>
-            <a:ext cx="2061972.0" cy="822960"/>
+            <a:ext cx="0" cy="822960"/>
           </a:xfrm>
           <a:prstGeom prst="line">
             <a:avLst/>
@@ -4271,6 +4062,7 @@
         <a:solidFill>
           <a:srgbClr val="FFFFFF"/>
         </a:solidFill>
+        <a:effectLst/>
       </p:bgPr>
     </p:bg>
     <p:spTree>
@@ -4308,7 +4100,7 @@
           <a:bodyPr wrap="square" rtlCol="0" anchor="ctr"/>
           <a:lstStyle/>
           <a:p>
-            <a:pPr indent="0" marL="0">
+            <a:pPr marL="0" indent="0">
               <a:buNone/>
             </a:pPr>
             <a:r>
@@ -4347,7 +4139,7 @@
           <a:bodyPr wrap="square" rtlCol="0" anchor="ctr"/>
           <a:lstStyle/>
           <a:p>
-            <a:pPr algn="r" indent="0" marL="0">
+            <a:pPr marL="0" indent="0" algn="r">
               <a:buNone/>
             </a:pPr>
             <a:r>
@@ -4386,11 +4178,11 @@
           <a:bodyPr wrap="square" rtlCol="0" anchor="ctr"/>
           <a:lstStyle/>
           <a:p>
-            <a:pPr indent="0" marL="0">
-              <a:buNone/>
-            </a:pPr>
-            <a:r>
-              <a:rPr lang="en-US" sz="1300" b="1" spc="200" kern="0" dirty="0">
+            <a:pPr marL="0" indent="0">
+              <a:buNone/>
+            </a:pPr>
+            <a:r>
+              <a:rPr lang="en-US" sz="1300" b="1" kern="0" spc="200" dirty="0">
                 <a:solidFill>
                   <a:srgbClr val="C9A24B"/>
                 </a:solidFill>
@@ -4425,7 +4217,7 @@
           <a:bodyPr wrap="square" rtlCol="0" anchor="ctr"/>
           <a:lstStyle/>
           <a:p>
-            <a:pPr indent="0" marL="0">
+            <a:pPr marL="0" indent="0">
               <a:buNone/>
             </a:pPr>
             <a:r>
@@ -4549,6 +4341,7 @@
           <a:lstStyle/>
           <a:p>
             <a:pPr algn="ctr"/>
+            <a:endParaRPr/>
           </a:p>
         </p:txBody>
       </p:sp>
@@ -4786,6 +4579,7 @@
           <a:lstStyle/>
           <a:p>
             <a:pPr algn="ctr"/>
+            <a:endParaRPr/>
           </a:p>
         </p:txBody>
       </p:sp>
@@ -4940,6 +4734,7 @@
         <a:solidFill>
           <a:srgbClr val="FFFFFF"/>
         </a:solidFill>
+        <a:effectLst/>
       </p:bgPr>
     </p:bg>
     <p:spTree>
@@ -4977,7 +4772,7 @@
           <a:bodyPr wrap="square" rtlCol="0" anchor="ctr"/>
           <a:lstStyle/>
           <a:p>
-            <a:pPr indent="0" marL="0">
+            <a:pPr marL="0" indent="0">
               <a:buNone/>
             </a:pPr>
             <a:r>
@@ -5016,7 +4811,7 @@
           <a:bodyPr wrap="square" rtlCol="0" anchor="ctr"/>
           <a:lstStyle/>
           <a:p>
-            <a:pPr algn="r" indent="0" marL="0">
+            <a:pPr marL="0" indent="0" algn="r">
               <a:buNone/>
             </a:pPr>
             <a:r>
@@ -5055,11 +4850,11 @@
           <a:bodyPr wrap="square" rtlCol="0" anchor="ctr"/>
           <a:lstStyle/>
           <a:p>
-            <a:pPr indent="0" marL="0">
-              <a:buNone/>
-            </a:pPr>
-            <a:r>
-              <a:rPr lang="en-US" sz="1300" b="1" spc="200" kern="0" dirty="0">
+            <a:pPr marL="0" indent="0">
+              <a:buNone/>
+            </a:pPr>
+            <a:r>
+              <a:rPr lang="en-US" sz="1300" b="1" kern="0" spc="200" dirty="0">
                 <a:solidFill>
                   <a:srgbClr val="C9A24B"/>
                 </a:solidFill>
@@ -5094,7 +4889,7 @@
           <a:bodyPr wrap="square" rtlCol="0" anchor="ctr"/>
           <a:lstStyle/>
           <a:p>
-            <a:pPr indent="0" marL="0">
+            <a:pPr marL="0" indent="0">
               <a:buNone/>
             </a:pPr>
             <a:r>
@@ -5133,7 +4928,7 @@
           <a:bodyPr wrap="square" rtlCol="0" anchor="ctr"/>
           <a:lstStyle/>
           <a:p>
-            <a:pPr indent="0" marL="0">
+            <a:pPr marL="0" indent="0">
               <a:lnSpc>
                 <a:spcPct val="125000"/>
               </a:lnSpc>
@@ -5182,7 +4977,10 @@
         </p:spPr>
         <p:txBody>
           <a:bodyPr/>
-          <a:p/>
+          <a:lstStyle/>
+          <a:p>
+            <a:endParaRPr/>
+          </a:p>
         </p:txBody>
       </p:sp>
       <p:sp>
@@ -5206,7 +5004,7 @@
           <a:bodyPr wrap="square" rtlCol="0" anchor="t"/>
           <a:lstStyle/>
           <a:p>
-            <a:pPr indent="0" marL="0">
+            <a:pPr marL="0" indent="0">
               <a:buNone/>
             </a:pPr>
             <a:r>
@@ -5245,7 +5043,7 @@
           <a:bodyPr wrap="square" rtlCol="0" anchor="t"/>
           <a:lstStyle/>
           <a:p>
-            <a:pPr indent="0" marL="0">
+            <a:pPr marL="0" indent="0">
               <a:lnSpc>
                 <a:spcPct val="120000"/>
               </a:lnSpc>
@@ -5294,7 +5092,10 @@
         </p:spPr>
         <p:txBody>
           <a:bodyPr/>
-          <a:p/>
+          <a:lstStyle/>
+          <a:p>
+            <a:endParaRPr/>
+          </a:p>
         </p:txBody>
       </p:sp>
       <p:sp>
@@ -5318,7 +5119,7 @@
           <a:bodyPr wrap="square" rtlCol="0" anchor="t"/>
           <a:lstStyle/>
           <a:p>
-            <a:pPr indent="0" marL="0">
+            <a:pPr marL="0" indent="0">
               <a:buNone/>
             </a:pPr>
             <a:r>
@@ -5357,7 +5158,7 @@
           <a:bodyPr wrap="square" rtlCol="0" anchor="t"/>
           <a:lstStyle/>
           <a:p>
-            <a:pPr indent="0" marL="0">
+            <a:pPr marL="0" indent="0">
               <a:lnSpc>
                 <a:spcPct val="120000"/>
               </a:lnSpc>
@@ -5401,7 +5202,10 @@
         </p:spPr>
         <p:txBody>
           <a:bodyPr/>
-          <a:p/>
+          <a:lstStyle/>
+          <a:p>
+            <a:endParaRPr/>
+          </a:p>
         </p:txBody>
       </p:sp>
       <p:sp>
@@ -5425,7 +5229,7 @@
           <a:bodyPr wrap="square" rtlCol="0" anchor="t"/>
           <a:lstStyle/>
           <a:p>
-            <a:pPr indent="0" marL="0">
+            <a:pPr marL="0" indent="0">
               <a:buNone/>
             </a:pPr>
             <a:r>
@@ -5464,7 +5268,7 @@
           <a:bodyPr wrap="square" rtlCol="0" anchor="t"/>
           <a:lstStyle/>
           <a:p>
-            <a:pPr indent="0" marL="0">
+            <a:pPr marL="0" indent="0">
               <a:lnSpc>
                 <a:spcPct val="120000"/>
               </a:lnSpc>
@@ -5525,6 +5329,7 @@
         <a:solidFill>
           <a:srgbClr val="FFFFFF"/>
         </a:solidFill>
+        <a:effectLst/>
       </p:bgPr>
     </p:bg>
     <p:spTree>
@@ -5562,7 +5367,7 @@
           <a:bodyPr wrap="square" rtlCol="0" anchor="ctr"/>
           <a:lstStyle/>
           <a:p>
-            <a:pPr indent="0" marL="0">
+            <a:pPr marL="0" indent="0">
               <a:buNone/>
             </a:pPr>
             <a:r>
@@ -5601,7 +5406,7 @@
           <a:bodyPr wrap="square" rtlCol="0" anchor="ctr"/>
           <a:lstStyle/>
           <a:p>
-            <a:pPr algn="r" indent="0" marL="0">
+            <a:pPr marL="0" indent="0" algn="r">
               <a:buNone/>
             </a:pPr>
             <a:r>
@@ -5640,11 +5445,11 @@
           <a:bodyPr wrap="square" rtlCol="0" anchor="ctr"/>
           <a:lstStyle/>
           <a:p>
-            <a:pPr indent="0" marL="0">
-              <a:buNone/>
-            </a:pPr>
-            <a:r>
-              <a:rPr lang="en-US" sz="1300" b="1" spc="200" kern="0" dirty="0">
+            <a:pPr marL="0" indent="0">
+              <a:buNone/>
+            </a:pPr>
+            <a:r>
+              <a:rPr lang="en-US" sz="1300" b="1" kern="0" spc="200" dirty="0">
                 <a:solidFill>
                   <a:srgbClr val="C9A24B"/>
                 </a:solidFill>
@@ -5679,7 +5484,7 @@
           <a:bodyPr wrap="square" rtlCol="0" anchor="ctr"/>
           <a:lstStyle/>
           <a:p>
-            <a:pPr indent="0" marL="0">
+            <a:pPr marL="0" indent="0">
               <a:buNone/>
             </a:pPr>
             <a:r>
@@ -5801,6 +5606,7 @@
           <a:lstStyle/>
           <a:p>
             <a:pPr algn="ctr"/>
+            <a:endParaRPr/>
           </a:p>
         </p:txBody>
       </p:sp>
@@ -5845,6 +5651,7 @@
           <a:lstStyle/>
           <a:p>
             <a:pPr algn="ctr"/>
+            <a:endParaRPr/>
           </a:p>
         </p:txBody>
       </p:sp>
@@ -5963,6 +5770,7 @@
           <a:lstStyle/>
           <a:p>
             <a:pPr algn="ctr"/>
+            <a:endParaRPr/>
           </a:p>
         </p:txBody>
       </p:sp>
@@ -6081,6 +5889,7 @@
           <a:lstStyle/>
           <a:p>
             <a:pPr algn="ctr"/>
+            <a:endParaRPr/>
           </a:p>
         </p:txBody>
       </p:sp>
@@ -6199,6 +6008,7 @@
           <a:lstStyle/>
           <a:p>
             <a:pPr algn="ctr"/>
+            <a:endParaRPr/>
           </a:p>
         </p:txBody>
       </p:sp>
@@ -6317,6 +6127,7 @@
           <a:lstStyle/>
           <a:p>
             <a:pPr algn="ctr"/>
+            <a:endParaRPr/>
           </a:p>
         </p:txBody>
       </p:sp>
@@ -6410,6 +6221,7 @@
         <a:solidFill>
           <a:srgbClr val="FFFFFF"/>
         </a:solidFill>
+        <a:effectLst/>
       </p:bgPr>
     </p:bg>
     <p:spTree>
@@ -6447,7 +6259,7 @@
           <a:bodyPr wrap="square" rtlCol="0" anchor="ctr"/>
           <a:lstStyle/>
           <a:p>
-            <a:pPr indent="0" marL="0">
+            <a:pPr marL="0" indent="0">
               <a:buNone/>
             </a:pPr>
             <a:r>
@@ -6486,7 +6298,7 @@
           <a:bodyPr wrap="square" rtlCol="0" anchor="ctr"/>
           <a:lstStyle/>
           <a:p>
-            <a:pPr algn="r" indent="0" marL="0">
+            <a:pPr marL="0" indent="0" algn="r">
               <a:buNone/>
             </a:pPr>
             <a:r>
@@ -6525,11 +6337,11 @@
           <a:bodyPr wrap="square" rtlCol="0" anchor="ctr"/>
           <a:lstStyle/>
           <a:p>
-            <a:pPr indent="0" marL="0">
-              <a:buNone/>
-            </a:pPr>
-            <a:r>
-              <a:rPr lang="en-US" sz="1300" b="1" spc="200" kern="0" dirty="0">
+            <a:pPr marL="0" indent="0">
+              <a:buNone/>
+            </a:pPr>
+            <a:r>
+              <a:rPr lang="en-US" sz="1300" b="1" kern="0" spc="200" dirty="0">
                 <a:solidFill>
                   <a:srgbClr val="C9A24B"/>
                 </a:solidFill>
@@ -6564,7 +6376,7 @@
           <a:bodyPr wrap="square" rtlCol="0" anchor="ctr"/>
           <a:lstStyle/>
           <a:p>
-            <a:pPr indent="0" marL="0">
+            <a:pPr marL="0" indent="0">
               <a:buNone/>
             </a:pPr>
             <a:r>
@@ -6688,6 +6500,7 @@
           <a:lstStyle/>
           <a:p>
             <a:pPr algn="ctr"/>
+            <a:endParaRPr/>
           </a:p>
         </p:txBody>
       </p:sp>
@@ -6832,6 +6645,7 @@
           <a:lstStyle/>
           <a:p>
             <a:pPr algn="ctr"/>
+            <a:endParaRPr/>
           </a:p>
         </p:txBody>
       </p:sp>
@@ -6976,6 +6790,7 @@
           <a:lstStyle/>
           <a:p>
             <a:pPr algn="ctr"/>
+            <a:endParaRPr/>
           </a:p>
         </p:txBody>
       </p:sp>
@@ -7120,6 +6935,7 @@
           <a:lstStyle/>
           <a:p>
             <a:pPr algn="ctr"/>
+            <a:endParaRPr/>
           </a:p>
         </p:txBody>
       </p:sp>
@@ -7237,6 +7053,7 @@
         <a:solidFill>
           <a:srgbClr val="FFFFFF"/>
         </a:solidFill>
+        <a:effectLst/>
       </p:bgPr>
     </p:bg>
     <p:spTree>
@@ -7274,7 +7091,7 @@
           <a:bodyPr wrap="square" rtlCol="0" anchor="ctr"/>
           <a:lstStyle/>
           <a:p>
-            <a:pPr indent="0" marL="0">
+            <a:pPr marL="0" indent="0">
               <a:buNone/>
             </a:pPr>
             <a:r>
@@ -7313,7 +7130,7 @@
           <a:bodyPr wrap="square" rtlCol="0" anchor="ctr"/>
           <a:lstStyle/>
           <a:p>
-            <a:pPr algn="r" indent="0" marL="0">
+            <a:pPr marL="0" indent="0" algn="r">
               <a:buNone/>
             </a:pPr>
             <a:r>
@@ -7352,11 +7169,11 @@
           <a:bodyPr wrap="square" rtlCol="0" anchor="ctr"/>
           <a:lstStyle/>
           <a:p>
-            <a:pPr indent="0" marL="0">
-              <a:buNone/>
-            </a:pPr>
-            <a:r>
-              <a:rPr lang="en-US" sz="1300" b="1" spc="200" kern="0" dirty="0">
+            <a:pPr marL="0" indent="0">
+              <a:buNone/>
+            </a:pPr>
+            <a:r>
+              <a:rPr lang="en-US" sz="1300" b="1" kern="0" spc="200" dirty="0">
                 <a:solidFill>
                   <a:srgbClr val="C9A24B"/>
                 </a:solidFill>
@@ -7391,7 +7208,7 @@
           <a:bodyPr wrap="square" rtlCol="0" anchor="ctr"/>
           <a:lstStyle/>
           <a:p>
-            <a:pPr indent="0" marL="0">
+            <a:pPr marL="0" indent="0">
               <a:buNone/>
             </a:pPr>
             <a:r>
@@ -7437,7 +7254,10 @@
         </p:spPr>
         <p:txBody>
           <a:bodyPr/>
-          <a:p/>
+          <a:lstStyle/>
+          <a:p>
+            <a:endParaRPr/>
+          </a:p>
         </p:txBody>
       </p:sp>
       <p:sp>
@@ -7461,11 +7281,11 @@
           <a:bodyPr wrap="square" rtlCol="0" anchor="ctr"/>
           <a:lstStyle/>
           <a:p>
-            <a:pPr indent="0" marL="0">
-              <a:buNone/>
-            </a:pPr>
-            <a:r>
-              <a:rPr lang="en-US" sz="1050" b="1" spc="100" kern="0" dirty="0">
+            <a:pPr marL="0" indent="0">
+              <a:buNone/>
+            </a:pPr>
+            <a:r>
+              <a:rPr lang="en-US" sz="1050" b="1" kern="0" spc="100" dirty="0">
                 <a:solidFill>
                   <a:srgbClr val="2E7D5B"/>
                 </a:solidFill>
@@ -7500,7 +7320,7 @@
           <a:bodyPr wrap="square" rtlCol="0" anchor="t"/>
           <a:lstStyle/>
           <a:p>
-            <a:pPr indent="0" marL="0">
+            <a:pPr marL="0" indent="0">
               <a:buNone/>
             </a:pPr>
             <a:r>
@@ -7546,7 +7366,10 @@
         </p:spPr>
         <p:txBody>
           <a:bodyPr/>
-          <a:p/>
+          <a:lstStyle/>
+          <a:p>
+            <a:endParaRPr/>
+          </a:p>
         </p:txBody>
       </p:sp>
       <p:sp>
@@ -7570,7 +7393,7 @@
           <a:bodyPr wrap="square" rtlCol="0" anchor="ctr"/>
           <a:lstStyle/>
           <a:p>
-            <a:pPr indent="0" marL="0">
+            <a:pPr marL="0" indent="0">
               <a:buNone/>
             </a:pPr>
             <a:r>
@@ -7609,7 +7432,7 @@
           <a:bodyPr wrap="square" rtlCol="0" anchor="t"/>
           <a:lstStyle/>
           <a:p>
-            <a:pPr indent="0" marL="0">
+            <a:pPr marL="0" indent="0">
               <a:lnSpc>
                 <a:spcPct val="125000"/>
               </a:lnSpc>
@@ -7658,7 +7481,10 @@
         </p:spPr>
         <p:txBody>
           <a:bodyPr/>
-          <a:p/>
+          <a:lstStyle/>
+          <a:p>
+            <a:endParaRPr/>
+          </a:p>
         </p:txBody>
       </p:sp>
       <p:sp>
@@ -7682,7 +7508,7 @@
           <a:bodyPr wrap="square" rtlCol="0" anchor="ctr"/>
           <a:lstStyle/>
           <a:p>
-            <a:pPr indent="0" marL="0">
+            <a:pPr marL="0" indent="0">
               <a:buNone/>
             </a:pPr>
             <a:r>
@@ -7721,7 +7547,7 @@
           <a:bodyPr wrap="square" rtlCol="0" anchor="t"/>
           <a:lstStyle/>
           <a:p>
-            <a:pPr indent="0" marL="0">
+            <a:pPr marL="0" indent="0">
               <a:lnSpc>
                 <a:spcPct val="125000"/>
               </a:lnSpc>
@@ -7765,7 +7591,10 @@
         </p:spPr>
         <p:txBody>
           <a:bodyPr/>
-          <a:p/>
+          <a:lstStyle/>
+          <a:p>
+            <a:endParaRPr/>
+          </a:p>
         </p:txBody>
       </p:sp>
       <p:sp>
@@ -7789,7 +7618,7 @@
           <a:bodyPr wrap="square" rtlCol="0" anchor="ctr"/>
           <a:lstStyle/>
           <a:p>
-            <a:pPr indent="0" marL="0">
+            <a:pPr marL="0" indent="0">
               <a:buNone/>
             </a:pPr>
             <a:r>
@@ -7828,7 +7657,7 @@
           <a:bodyPr wrap="square" rtlCol="0" anchor="t"/>
           <a:lstStyle/>
           <a:p>
-            <a:pPr indent="0" marL="0">
+            <a:pPr marL="0" indent="0">
               <a:lnSpc>
                 <a:spcPct val="125000"/>
               </a:lnSpc>
@@ -7865,6 +7694,7 @@
         <a:solidFill>
           <a:srgbClr val="FFFFFF"/>
         </a:solidFill>
+        <a:effectLst/>
       </p:bgPr>
     </p:bg>
     <p:spTree>
@@ -7902,7 +7732,7 @@
           <a:bodyPr wrap="square" rtlCol="0" anchor="ctr"/>
           <a:lstStyle/>
           <a:p>
-            <a:pPr indent="0" marL="0">
+            <a:pPr marL="0" indent="0">
               <a:buNone/>
             </a:pPr>
             <a:r>
@@ -7941,7 +7771,7 @@
           <a:bodyPr wrap="square" rtlCol="0" anchor="ctr"/>
           <a:lstStyle/>
           <a:p>
-            <a:pPr algn="r" indent="0" marL="0">
+            <a:pPr marL="0" indent="0" algn="r">
               <a:buNone/>
             </a:pPr>
             <a:r>
@@ -7980,11 +7810,11 @@
           <a:bodyPr wrap="square" rtlCol="0" anchor="ctr"/>
           <a:lstStyle/>
           <a:p>
-            <a:pPr indent="0" marL="0">
-              <a:buNone/>
-            </a:pPr>
-            <a:r>
-              <a:rPr lang="en-US" sz="1300" b="1" spc="200" kern="0" dirty="0">
+            <a:pPr marL="0" indent="0">
+              <a:buNone/>
+            </a:pPr>
+            <a:r>
+              <a:rPr lang="en-US" sz="1300" b="1" kern="0" spc="200" dirty="0">
                 <a:solidFill>
                   <a:srgbClr val="C9A24B"/>
                 </a:solidFill>
@@ -8019,7 +7849,7 @@
           <a:bodyPr wrap="square" rtlCol="0" anchor="ctr"/>
           <a:lstStyle/>
           <a:p>
-            <a:pPr indent="0" marL="0">
+            <a:pPr marL="0" indent="0">
               <a:buNone/>
             </a:pPr>
             <a:r>
@@ -8065,7 +7895,10 @@
         </p:spPr>
         <p:txBody>
           <a:bodyPr/>
-          <a:p/>
+          <a:lstStyle/>
+          <a:p>
+            <a:endParaRPr/>
+          </a:p>
         </p:txBody>
       </p:sp>
       <p:sp>
@@ -8089,11 +7922,11 @@
           <a:bodyPr wrap="square" rtlCol="0" anchor="ctr"/>
           <a:lstStyle/>
           <a:p>
-            <a:pPr indent="0" marL="0">
-              <a:buNone/>
-            </a:pPr>
-            <a:r>
-              <a:rPr lang="en-US" sz="1050" b="1" spc="100" kern="0" dirty="0">
+            <a:pPr marL="0" indent="0">
+              <a:buNone/>
+            </a:pPr>
+            <a:r>
+              <a:rPr lang="en-US" sz="1050" b="1" kern="0" spc="100" dirty="0">
                 <a:solidFill>
                   <a:srgbClr val="2E7D5B"/>
                 </a:solidFill>
@@ -8128,7 +7961,7 @@
           <a:bodyPr wrap="square" rtlCol="0" anchor="t"/>
           <a:lstStyle/>
           <a:p>
-            <a:pPr indent="0" marL="0">
+            <a:pPr marL="0" indent="0">
               <a:buNone/>
             </a:pPr>
             <a:r>
@@ -8167,11 +8000,11 @@
           <a:bodyPr wrap="square" rtlCol="0" anchor="ctr"/>
           <a:lstStyle/>
           <a:p>
-            <a:pPr indent="0" marL="0">
-              <a:buNone/>
-            </a:pPr>
-            <a:r>
-              <a:rPr lang="en-US" sz="1100" b="1" spc="100" kern="0" dirty="0">
+            <a:pPr marL="0" indent="0">
+              <a:buNone/>
+            </a:pPr>
+            <a:r>
+              <a:rPr lang="en-US" sz="1100" b="1" kern="0" spc="100" dirty="0">
                 <a:solidFill>
                   <a:srgbClr val="5B6472"/>
                 </a:solidFill>
@@ -8206,7 +8039,10 @@
         </p:spPr>
         <p:txBody>
           <a:bodyPr/>
-          <a:p/>
+          <a:lstStyle/>
+          <a:p>
+            <a:endParaRPr/>
+          </a:p>
         </p:txBody>
       </p:sp>
       <p:sp>
@@ -8230,7 +8066,7 @@
           <a:bodyPr wrap="square" rtlCol="0" anchor="t"/>
           <a:lstStyle/>
           <a:p>
-            <a:pPr indent="0" marL="0">
+            <a:pPr marL="0" indent="0">
               <a:buNone/>
             </a:pPr>
             <a:r>
@@ -8269,7 +8105,10 @@
         </p:spPr>
         <p:txBody>
           <a:bodyPr/>
-          <a:p/>
+          <a:lstStyle/>
+          <a:p>
+            <a:endParaRPr/>
+          </a:p>
         </p:txBody>
       </p:sp>
       <p:sp>
@@ -8293,7 +8132,7 @@
           <a:bodyPr wrap="square" rtlCol="0" anchor="t"/>
           <a:lstStyle/>
           <a:p>
-            <a:pPr indent="0" marL="0">
+            <a:pPr marL="0" indent="0">
               <a:buNone/>
             </a:pPr>
             <a:r>
@@ -8332,7 +8171,10 @@
         </p:spPr>
         <p:txBody>
           <a:bodyPr/>
-          <a:p/>
+          <a:lstStyle/>
+          <a:p>
+            <a:endParaRPr/>
+          </a:p>
         </p:txBody>
       </p:sp>
       <p:sp>
@@ -8356,7 +8198,7 @@
           <a:bodyPr wrap="square" rtlCol="0" anchor="t"/>
           <a:lstStyle/>
           <a:p>
-            <a:pPr indent="0" marL="0">
+            <a:pPr marL="0" indent="0">
               <a:buNone/>
             </a:pPr>
             <a:r>
@@ -8395,7 +8237,10 @@
         </p:spPr>
         <p:txBody>
           <a:bodyPr/>
-          <a:p/>
+          <a:lstStyle/>
+          <a:p>
+            <a:endParaRPr/>
+          </a:p>
         </p:txBody>
       </p:sp>
       <p:sp>
@@ -8419,7 +8264,7 @@
           <a:bodyPr wrap="square" rtlCol="0" anchor="t"/>
           <a:lstStyle/>
           <a:p>
-            <a:pPr indent="0" marL="0">
+            <a:pPr marL="0" indent="0">
               <a:buNone/>
             </a:pPr>
             <a:r>
@@ -8458,7 +8303,10 @@
         </p:spPr>
         <p:txBody>
           <a:bodyPr/>
-          <a:p/>
+          <a:lstStyle/>
+          <a:p>
+            <a:endParaRPr/>
+          </a:p>
         </p:txBody>
       </p:sp>
       <p:sp>
@@ -8482,7 +8330,7 @@
           <a:bodyPr wrap="square" rtlCol="0" anchor="t"/>
           <a:lstStyle/>
           <a:p>
-            <a:pPr indent="0" marL="0">
+            <a:pPr marL="0" indent="0">
               <a:buNone/>
             </a:pPr>
             <a:r>
@@ -8523,7 +8371,10 @@
         </p:spPr>
         <p:txBody>
           <a:bodyPr/>
-          <a:p/>
+          <a:lstStyle/>
+          <a:p>
+            <a:endParaRPr/>
+          </a:p>
         </p:txBody>
       </p:sp>
       <p:sp>
@@ -8547,7 +8398,7 @@
           <a:bodyPr wrap="square" rtlCol="0" anchor="ctr"/>
           <a:lstStyle/>
           <a:p>
-            <a:pPr indent="0" marL="0">
+            <a:pPr marL="0" indent="0">
               <a:buNone/>
             </a:pPr>
             <a:r>
@@ -8586,7 +8437,7 @@
           <a:bodyPr wrap="square" rtlCol="0" anchor="t"/>
           <a:lstStyle/>
           <a:p>
-            <a:pPr indent="0" marL="0">
+            <a:pPr marL="0" indent="0">
               <a:lnSpc>
                 <a:spcPct val="140000"/>
               </a:lnSpc>
@@ -8643,15 +8494,12 @@
                 <a:spcPct val="140000"/>
               </a:lnSpc>
             </a:pPr>
-            <a:r>
-              <a:rPr sz="1300">
-                <a:solidFill>
-                  <a:srgbClr val="D7F5C9"/>
-                </a:solidFill>
-                <a:latin typeface="Consolas"/>
-              </a:rPr>
-              <a:t/>
-            </a:r>
+            <a:endParaRPr sz="1300">
+              <a:solidFill>
+                <a:srgbClr val="D7F5C9"/>
+              </a:solidFill>
+              <a:latin typeface="Consolas"/>
+            </a:endParaRPr>
           </a:p>
           <a:p>
             <a:pPr>
@@ -8767,6 +8615,7 @@
         <a:solidFill>
           <a:srgbClr val="FFFFFF"/>
         </a:solidFill>
+        <a:effectLst/>
       </p:bgPr>
     </p:bg>
     <p:spTree>
@@ -8804,7 +8653,7 @@
           <a:bodyPr wrap="square" rtlCol="0" anchor="ctr"/>
           <a:lstStyle/>
           <a:p>
-            <a:pPr indent="0" marL="0">
+            <a:pPr marL="0" indent="0">
               <a:buNone/>
             </a:pPr>
             <a:r>
@@ -8843,7 +8692,7 @@
           <a:bodyPr wrap="square" rtlCol="0" anchor="ctr"/>
           <a:lstStyle/>
           <a:p>
-            <a:pPr algn="r" indent="0" marL="0">
+            <a:pPr marL="0" indent="0" algn="r">
               <a:buNone/>
             </a:pPr>
             <a:r>
@@ -8882,11 +8731,11 @@
           <a:bodyPr wrap="square" rtlCol="0" anchor="ctr"/>
           <a:lstStyle/>
           <a:p>
-            <a:pPr indent="0" marL="0">
-              <a:buNone/>
-            </a:pPr>
-            <a:r>
-              <a:rPr lang="en-US" sz="1300" b="1" spc="200" kern="0" dirty="0">
+            <a:pPr marL="0" indent="0">
+              <a:buNone/>
+            </a:pPr>
+            <a:r>
+              <a:rPr lang="en-US" sz="1300" b="1" kern="0" spc="200" dirty="0">
                 <a:solidFill>
                   <a:srgbClr val="C9A24B"/>
                 </a:solidFill>
@@ -8921,7 +8770,7 @@
           <a:bodyPr wrap="square" rtlCol="0" anchor="ctr"/>
           <a:lstStyle/>
           <a:p>
-            <a:pPr indent="0" marL="0">
+            <a:pPr marL="0" indent="0">
               <a:buNone/>
             </a:pPr>
             <a:r>
@@ -8967,7 +8816,10 @@
         </p:spPr>
         <p:txBody>
           <a:bodyPr/>
-          <a:p/>
+          <a:lstStyle/>
+          <a:p>
+            <a:endParaRPr/>
+          </a:p>
         </p:txBody>
       </p:sp>
       <p:sp>
@@ -8991,7 +8843,10 @@
         </p:spPr>
         <p:txBody>
           <a:bodyPr/>
-          <a:p/>
+          <a:lstStyle/>
+          <a:p>
+            <a:endParaRPr/>
+          </a:p>
         </p:txBody>
       </p:sp>
       <p:sp>
@@ -9015,7 +8870,7 @@
           <a:bodyPr wrap="square" rtlCol="0" anchor="ctr"/>
           <a:lstStyle/>
           <a:p>
-            <a:pPr indent="0" marL="0">
+            <a:pPr marL="0" indent="0">
               <a:buNone/>
             </a:pPr>
             <a:r>
@@ -9054,7 +8909,7 @@
           <a:bodyPr wrap="square" rtlCol="0" anchor="t"/>
           <a:lstStyle/>
           <a:p>
-            <a:pPr indent="0" marL="0">
+            <a:pPr marL="0" indent="0">
               <a:lnSpc>
                 <a:spcPct val="120000"/>
               </a:lnSpc>
@@ -9103,7 +8958,10 @@
         </p:spPr>
         <p:txBody>
           <a:bodyPr/>
-          <a:p/>
+          <a:lstStyle/>
+          <a:p>
+            <a:endParaRPr/>
+          </a:p>
         </p:txBody>
       </p:sp>
       <p:sp>
@@ -9127,7 +8985,10 @@
         </p:spPr>
         <p:txBody>
           <a:bodyPr/>
-          <a:p/>
+          <a:lstStyle/>
+          <a:p>
+            <a:endParaRPr/>
+          </a:p>
         </p:txBody>
       </p:sp>
       <p:sp>
@@ -9151,7 +9012,7 @@
           <a:bodyPr wrap="square" rtlCol="0" anchor="ctr"/>
           <a:lstStyle/>
           <a:p>
-            <a:pPr indent="0" marL="0">
+            <a:pPr marL="0" indent="0">
               <a:buNone/>
             </a:pPr>
             <a:r>
@@ -9190,7 +9051,7 @@
           <a:bodyPr wrap="square" rtlCol="0" anchor="t"/>
           <a:lstStyle/>
           <a:p>
-            <a:pPr indent="0" marL="0">
+            <a:pPr marL="0" indent="0">
               <a:lnSpc>
                 <a:spcPct val="120000"/>
               </a:lnSpc>
@@ -9239,7 +9100,10 @@
         </p:spPr>
         <p:txBody>
           <a:bodyPr/>
-          <a:p/>
+          <a:lstStyle/>
+          <a:p>
+            <a:endParaRPr/>
+          </a:p>
         </p:txBody>
       </p:sp>
       <p:sp>
@@ -9263,7 +9127,10 @@
         </p:spPr>
         <p:txBody>
           <a:bodyPr/>
-          <a:p/>
+          <a:lstStyle/>
+          <a:p>
+            <a:endParaRPr/>
+          </a:p>
         </p:txBody>
       </p:sp>
       <p:sp>
@@ -9287,7 +9154,7 @@
           <a:bodyPr wrap="square" rtlCol="0" anchor="ctr"/>
           <a:lstStyle/>
           <a:p>
-            <a:pPr indent="0" marL="0">
+            <a:pPr marL="0" indent="0">
               <a:buNone/>
             </a:pPr>
             <a:r>
@@ -9326,7 +9193,7 @@
           <a:bodyPr wrap="square" rtlCol="0" anchor="t"/>
           <a:lstStyle/>
           <a:p>
-            <a:pPr indent="0" marL="0">
+            <a:pPr marL="0" indent="0">
               <a:lnSpc>
                 <a:spcPct val="120000"/>
               </a:lnSpc>
@@ -9375,7 +9242,10 @@
         </p:spPr>
         <p:txBody>
           <a:bodyPr/>
-          <a:p/>
+          <a:lstStyle/>
+          <a:p>
+            <a:endParaRPr/>
+          </a:p>
         </p:txBody>
       </p:sp>
       <p:sp>
@@ -9399,7 +9269,10 @@
         </p:spPr>
         <p:txBody>
           <a:bodyPr/>
-          <a:p/>
+          <a:lstStyle/>
+          <a:p>
+            <a:endParaRPr/>
+          </a:p>
         </p:txBody>
       </p:sp>
       <p:sp>
@@ -9423,7 +9296,7 @@
           <a:bodyPr wrap="square" rtlCol="0" anchor="ctr"/>
           <a:lstStyle/>
           <a:p>
-            <a:pPr indent="0" marL="0">
+            <a:pPr marL="0" indent="0">
               <a:buNone/>
             </a:pPr>
             <a:r>
@@ -9462,7 +9335,7 @@
           <a:bodyPr wrap="square" rtlCol="0" anchor="t"/>
           <a:lstStyle/>
           <a:p>
-            <a:pPr indent="0" marL="0">
+            <a:pPr marL="0" indent="0">
               <a:lnSpc>
                 <a:spcPct val="120000"/>
               </a:lnSpc>
@@ -9499,6 +9372,7 @@
         <a:solidFill>
           <a:srgbClr val="FFFFFF"/>
         </a:solidFill>
+        <a:effectLst/>
       </p:bgPr>
     </p:bg>
     <p:spTree>
@@ -9536,7 +9410,7 @@
           <a:bodyPr wrap="square" rtlCol="0" anchor="ctr"/>
           <a:lstStyle/>
           <a:p>
-            <a:pPr indent="0" marL="0">
+            <a:pPr marL="0" indent="0">
               <a:buNone/>
             </a:pPr>
             <a:r>
@@ -9575,7 +9449,7 @@
           <a:bodyPr wrap="square" rtlCol="0" anchor="ctr"/>
           <a:lstStyle/>
           <a:p>
-            <a:pPr algn="r" indent="0" marL="0">
+            <a:pPr marL="0" indent="0" algn="r">
               <a:buNone/>
             </a:pPr>
             <a:r>
@@ -9614,11 +9488,11 @@
           <a:bodyPr wrap="square" rtlCol="0" anchor="ctr"/>
           <a:lstStyle/>
           <a:p>
-            <a:pPr indent="0" marL="0">
-              <a:buNone/>
-            </a:pPr>
-            <a:r>
-              <a:rPr lang="en-US" sz="1300" b="1" spc="200" kern="0" dirty="0">
+            <a:pPr marL="0" indent="0">
+              <a:buNone/>
+            </a:pPr>
+            <a:r>
+              <a:rPr lang="en-US" sz="1300" b="1" kern="0" spc="200" dirty="0">
                 <a:solidFill>
                   <a:srgbClr val="C9A24B"/>
                 </a:solidFill>
@@ -9653,7 +9527,7 @@
           <a:bodyPr wrap="square" rtlCol="0" anchor="ctr"/>
           <a:lstStyle/>
           <a:p>
-            <a:pPr indent="0" marL="0">
+            <a:pPr marL="0" indent="0">
               <a:buNone/>
             </a:pPr>
             <a:r>
@@ -9699,7 +9573,10 @@
         </p:spPr>
         <p:txBody>
           <a:bodyPr/>
-          <a:p/>
+          <a:lstStyle/>
+          <a:p>
+            <a:endParaRPr/>
+          </a:p>
         </p:txBody>
       </p:sp>
       <p:sp>
@@ -9723,7 +9600,7 @@
           <a:bodyPr wrap="square" rtlCol="0" anchor="ctr"/>
           <a:lstStyle/>
           <a:p>
-            <a:pPr indent="0" marL="0">
+            <a:pPr marL="0" indent="0">
               <a:buNone/>
             </a:pPr>
             <a:r>
@@ -9762,7 +9639,7 @@
           <a:bodyPr wrap="square" rtlCol="0" anchor="ctr"/>
           <a:lstStyle/>
           <a:p>
-            <a:pPr indent="0" marL="0">
+            <a:pPr marL="0" indent="0">
               <a:buNone/>
             </a:pPr>
             <a:r>
@@ -9801,7 +9678,7 @@
           <a:bodyPr wrap="square" rtlCol="0" anchor="t"/>
           <a:lstStyle/>
           <a:p>
-            <a:pPr indent="0" marL="0">
+            <a:pPr marL="0" indent="0">
               <a:buNone/>
             </a:pPr>
             <a:r>
@@ -9847,7 +9724,10 @@
         </p:spPr>
         <p:txBody>
           <a:bodyPr/>
-          <a:p/>
+          <a:lstStyle/>
+          <a:p>
+            <a:endParaRPr/>
+          </a:p>
         </p:txBody>
       </p:sp>
       <p:sp>
@@ -9871,7 +9751,7 @@
           <a:bodyPr wrap="square" rtlCol="0" anchor="ctr"/>
           <a:lstStyle/>
           <a:p>
-            <a:pPr indent="0" marL="0">
+            <a:pPr marL="0" indent="0">
               <a:buNone/>
             </a:pPr>
             <a:r>
@@ -9910,7 +9790,7 @@
           <a:bodyPr wrap="square" rtlCol="0" anchor="ctr"/>
           <a:lstStyle/>
           <a:p>
-            <a:pPr indent="0" marL="0">
+            <a:pPr marL="0" indent="0">
               <a:buNone/>
             </a:pPr>
             <a:r>
@@ -9949,7 +9829,7 @@
           <a:bodyPr wrap="square" rtlCol="0" anchor="t"/>
           <a:lstStyle/>
           <a:p>
-            <a:pPr indent="0" marL="0">
+            <a:pPr marL="0" indent="0">
               <a:buNone/>
             </a:pPr>
             <a:r>
@@ -9995,7 +9875,10 @@
         </p:spPr>
         <p:txBody>
           <a:bodyPr/>
-          <a:p/>
+          <a:lstStyle/>
+          <a:p>
+            <a:endParaRPr/>
+          </a:p>
         </p:txBody>
       </p:sp>
       <p:sp>
@@ -10019,7 +9902,7 @@
           <a:bodyPr wrap="square" rtlCol="0" anchor="ctr"/>
           <a:lstStyle/>
           <a:p>
-            <a:pPr indent="0" marL="0">
+            <a:pPr marL="0" indent="0">
               <a:buNone/>
             </a:pPr>
             <a:r>
@@ -10058,7 +9941,7 @@
           <a:bodyPr wrap="square" rtlCol="0" anchor="ctr"/>
           <a:lstStyle/>
           <a:p>
-            <a:pPr indent="0" marL="0">
+            <a:pPr marL="0" indent="0">
               <a:buNone/>
             </a:pPr>
             <a:r>
@@ -10097,7 +9980,7 @@
           <a:bodyPr wrap="square" rtlCol="0" anchor="t"/>
           <a:lstStyle/>
           <a:p>
-            <a:pPr indent="0" marL="0">
+            <a:pPr marL="0" indent="0">
               <a:buNone/>
             </a:pPr>
             <a:r>
@@ -10143,7 +10026,10 @@
         </p:spPr>
         <p:txBody>
           <a:bodyPr/>
-          <a:p/>
+          <a:lstStyle/>
+          <a:p>
+            <a:endParaRPr/>
+          </a:p>
         </p:txBody>
       </p:sp>
       <p:sp>
@@ -10167,7 +10053,7 @@
           <a:bodyPr wrap="square" rtlCol="0" anchor="ctr"/>
           <a:lstStyle/>
           <a:p>
-            <a:pPr indent="0" marL="0">
+            <a:pPr marL="0" indent="0">
               <a:buNone/>
             </a:pPr>
             <a:r>
@@ -10206,7 +10092,7 @@
           <a:bodyPr wrap="square" rtlCol="0" anchor="ctr"/>
           <a:lstStyle/>
           <a:p>
-            <a:pPr indent="0" marL="0">
+            <a:pPr marL="0" indent="0">
               <a:buNone/>
             </a:pPr>
             <a:r>
@@ -10245,7 +10131,7 @@
           <a:bodyPr wrap="square" rtlCol="0" anchor="t"/>
           <a:lstStyle/>
           <a:p>
-            <a:pPr indent="0" marL="0">
+            <a:pPr marL="0" indent="0">
               <a:buNone/>
             </a:pPr>
             <a:r>
@@ -10279,6 +10165,7 @@
         <a:solidFill>
           <a:srgbClr val="16233F"/>
         </a:solidFill>
+        <a:effectLst/>
       </p:bgPr>
     </p:bg>
     <p:spTree>
@@ -10316,7 +10203,10 @@
         </p:spPr>
         <p:txBody>
           <a:bodyPr/>
-          <a:p/>
+          <a:lstStyle/>
+          <a:p>
+            <a:endParaRPr/>
+          </a:p>
         </p:txBody>
       </p:sp>
       <p:sp>
@@ -10340,7 +10230,10 @@
         </p:spPr>
         <p:txBody>
           <a:bodyPr/>
-          <a:p/>
+          <a:lstStyle/>
+          <a:p>
+            <a:endParaRPr/>
+          </a:p>
         </p:txBody>
       </p:sp>
       <p:sp>
@@ -10364,11 +10257,11 @@
           <a:bodyPr wrap="square" rtlCol="0" anchor="ctr"/>
           <a:lstStyle/>
           <a:p>
-            <a:pPr indent="0" marL="0">
-              <a:buNone/>
-            </a:pPr>
-            <a:r>
-              <a:rPr lang="en-US" sz="1400" b="1" spc="200" kern="0" dirty="0">
+            <a:pPr marL="0" indent="0">
+              <a:buNone/>
+            </a:pPr>
+            <a:r>
+              <a:rPr lang="en-US" sz="1400" b="1" kern="0" spc="200" dirty="0">
                 <a:solidFill>
                   <a:srgbClr val="C9A24B"/>
                 </a:solidFill>
@@ -10403,7 +10296,7 @@
           <a:bodyPr wrap="square" rtlCol="0" anchor="ctr"/>
           <a:lstStyle/>
           <a:p>
-            <a:pPr indent="0" marL="0">
+            <a:pPr marL="0" indent="0">
               <a:buNone/>
             </a:pPr>
             <a:r>
@@ -10442,7 +10335,7 @@
           <a:bodyPr wrap="square" rtlCol="0" anchor="t"/>
           <a:lstStyle/>
           <a:p>
-            <a:pPr indent="0" marL="0">
+            <a:pPr marL="0" indent="0">
               <a:buNone/>
             </a:pPr>
             <a:r>
@@ -10484,7 +10377,10 @@
         </p:spPr>
         <p:txBody>
           <a:bodyPr/>
-          <a:p/>
+          <a:lstStyle/>
+          <a:p>
+            <a:endParaRPr/>
+          </a:p>
         </p:txBody>
       </p:sp>
       <p:sp>
@@ -10508,11 +10404,11 @@
           <a:bodyPr wrap="square" rtlCol="0" anchor="ctr"/>
           <a:lstStyle/>
           <a:p>
-            <a:pPr indent="0" marL="0">
-              <a:buNone/>
-            </a:pPr>
-            <a:r>
-              <a:rPr lang="en-US" sz="1050" b="1" spc="100" kern="0" dirty="0">
+            <a:pPr marL="0" indent="0">
+              <a:buNone/>
+            </a:pPr>
+            <a:r>
+              <a:rPr lang="en-US" sz="1050" b="1" kern="0" spc="100" dirty="0">
                 <a:solidFill>
                   <a:srgbClr val="8F97A8"/>
                 </a:solidFill>
@@ -10547,7 +10443,7 @@
           <a:bodyPr wrap="square" rtlCol="0" anchor="t"/>
           <a:lstStyle/>
           <a:p>
-            <a:pPr indent="0" marL="0">
+            <a:pPr marL="0" indent="0">
               <a:buNone/>
             </a:pPr>
             <a:r>
@@ -10586,7 +10482,7 @@
           <a:bodyPr wrap="square" rtlCol="0" anchor="ctr"/>
           <a:lstStyle/>
           <a:p>
-            <a:pPr indent="0" marL="0">
+            <a:pPr marL="0" indent="0">
               <a:buNone/>
             </a:pPr>
             <a:r>
@@ -10625,7 +10521,7 @@
           <a:bodyPr wrap="square" rtlCol="0" anchor="ctr"/>
           <a:lstStyle/>
           <a:p>
-            <a:pPr algn="r" indent="0" marL="0">
+            <a:pPr marL="0" indent="0" algn="r">
               <a:buNone/>
             </a:pPr>
             <a:r>
@@ -10659,6 +10555,7 @@
         <a:solidFill>
           <a:srgbClr val="FFFFFF"/>
         </a:solidFill>
+        <a:effectLst/>
       </p:bgPr>
     </p:bg>
     <p:spTree>
@@ -10696,7 +10593,7 @@
           <a:bodyPr wrap="square" rtlCol="0" anchor="ctr"/>
           <a:lstStyle/>
           <a:p>
-            <a:pPr indent="0" marL="0">
+            <a:pPr marL="0" indent="0">
               <a:buNone/>
             </a:pPr>
             <a:r>
@@ -10735,7 +10632,7 @@
           <a:bodyPr wrap="square" rtlCol="0" anchor="ctr"/>
           <a:lstStyle/>
           <a:p>
-            <a:pPr algn="r" indent="0" marL="0">
+            <a:pPr marL="0" indent="0" algn="r">
               <a:buNone/>
             </a:pPr>
             <a:r>
@@ -10774,11 +10671,11 @@
           <a:bodyPr wrap="square" rtlCol="0" anchor="ctr"/>
           <a:lstStyle/>
           <a:p>
-            <a:pPr indent="0" marL="0">
-              <a:buNone/>
-            </a:pPr>
-            <a:r>
-              <a:rPr lang="en-US" sz="1300" b="1" spc="200" kern="0" dirty="0">
+            <a:pPr marL="0" indent="0">
+              <a:buNone/>
+            </a:pPr>
+            <a:r>
+              <a:rPr lang="en-US" sz="1300" b="1" kern="0" spc="200" dirty="0">
                 <a:solidFill>
                   <a:srgbClr val="C9A24B"/>
                 </a:solidFill>
@@ -10813,7 +10710,7 @@
           <a:bodyPr wrap="square" rtlCol="0" anchor="ctr"/>
           <a:lstStyle/>
           <a:p>
-            <a:pPr indent="0" marL="0">
+            <a:pPr marL="0" indent="0">
               <a:buNone/>
             </a:pPr>
             <a:r>
@@ -10852,7 +10749,7 @@
           <a:bodyPr wrap="square" rtlCol="0" anchor="ctr"/>
           <a:lstStyle/>
           <a:p>
-            <a:pPr indent="0" marL="0">
+            <a:pPr marL="0" indent="0">
               <a:lnSpc>
                 <a:spcPct val="125000"/>
               </a:lnSpc>
@@ -10901,7 +10798,10 @@
         </p:spPr>
         <p:txBody>
           <a:bodyPr/>
-          <a:p/>
+          <a:lstStyle/>
+          <a:p>
+            <a:endParaRPr/>
+          </a:p>
         </p:txBody>
       </p:sp>
       <p:sp>
@@ -10925,7 +10825,7 @@
           <a:bodyPr wrap="square" rtlCol="0" anchor="t"/>
           <a:lstStyle/>
           <a:p>
-            <a:pPr indent="0" marL="0">
+            <a:pPr marL="0" indent="0">
               <a:buNone/>
             </a:pPr>
             <a:r>
@@ -10964,7 +10864,7 @@
           <a:bodyPr wrap="square" rtlCol="0" anchor="t"/>
           <a:lstStyle/>
           <a:p>
-            <a:pPr indent="0" marL="0">
+            <a:pPr marL="0" indent="0">
               <a:lnSpc>
                 <a:spcPct val="120000"/>
               </a:lnSpc>
@@ -11013,7 +10913,10 @@
         </p:spPr>
         <p:txBody>
           <a:bodyPr/>
-          <a:p/>
+          <a:lstStyle/>
+          <a:p>
+            <a:endParaRPr/>
+          </a:p>
         </p:txBody>
       </p:sp>
       <p:sp>
@@ -11037,7 +10940,7 @@
           <a:bodyPr wrap="square" rtlCol="0" anchor="t"/>
           <a:lstStyle/>
           <a:p>
-            <a:pPr indent="0" marL="0">
+            <a:pPr marL="0" indent="0">
               <a:buNone/>
             </a:pPr>
             <a:r>
@@ -11076,7 +10979,7 @@
           <a:bodyPr wrap="square" rtlCol="0" anchor="t"/>
           <a:lstStyle/>
           <a:p>
-            <a:pPr indent="0" marL="0">
+            <a:pPr marL="0" indent="0">
               <a:lnSpc>
                 <a:spcPct val="120000"/>
               </a:lnSpc>
@@ -11120,7 +11023,10 @@
         </p:spPr>
         <p:txBody>
           <a:bodyPr/>
-          <a:p/>
+          <a:lstStyle/>
+          <a:p>
+            <a:endParaRPr/>
+          </a:p>
         </p:txBody>
       </p:sp>
       <p:sp>
@@ -11144,7 +11050,7 @@
           <a:bodyPr wrap="square" rtlCol="0" anchor="t"/>
           <a:lstStyle/>
           <a:p>
-            <a:pPr indent="0" marL="0">
+            <a:pPr marL="0" indent="0">
               <a:buNone/>
             </a:pPr>
             <a:r>
@@ -11183,7 +11089,7 @@
           <a:bodyPr wrap="square" rtlCol="0" anchor="t"/>
           <a:lstStyle/>
           <a:p>
-            <a:pPr indent="0" marL="0">
+            <a:pPr marL="0" indent="0">
               <a:lnSpc>
                 <a:spcPct val="120000"/>
               </a:lnSpc>
@@ -11244,6 +11150,7 @@
         <a:solidFill>
           <a:srgbClr val="FFFFFF"/>
         </a:solidFill>
+        <a:effectLst/>
       </p:bgPr>
     </p:bg>
     <p:spTree>
@@ -11281,7 +11188,7 @@
           <a:bodyPr wrap="square" rtlCol="0" anchor="ctr"/>
           <a:lstStyle/>
           <a:p>
-            <a:pPr indent="0" marL="0">
+            <a:pPr marL="0" indent="0">
               <a:buNone/>
             </a:pPr>
             <a:r>
@@ -11320,7 +11227,7 @@
           <a:bodyPr wrap="square" rtlCol="0" anchor="ctr"/>
           <a:lstStyle/>
           <a:p>
-            <a:pPr algn="r" indent="0" marL="0">
+            <a:pPr marL="0" indent="0" algn="r">
               <a:buNone/>
             </a:pPr>
             <a:r>
@@ -11359,11 +11266,11 @@
           <a:bodyPr wrap="square" rtlCol="0" anchor="ctr"/>
           <a:lstStyle/>
           <a:p>
-            <a:pPr indent="0" marL="0">
-              <a:buNone/>
-            </a:pPr>
-            <a:r>
-              <a:rPr lang="en-US" sz="1300" b="1" spc="200" kern="0" dirty="0">
+            <a:pPr marL="0" indent="0">
+              <a:buNone/>
+            </a:pPr>
+            <a:r>
+              <a:rPr lang="en-US" sz="1300" b="1" kern="0" spc="200" dirty="0">
                 <a:solidFill>
                   <a:srgbClr val="C9A24B"/>
                 </a:solidFill>
@@ -11398,7 +11305,7 @@
           <a:bodyPr wrap="square" rtlCol="0" anchor="ctr"/>
           <a:lstStyle/>
           <a:p>
-            <a:pPr indent="0" marL="0">
+            <a:pPr marL="0" indent="0">
               <a:buNone/>
             </a:pPr>
             <a:r>
@@ -11522,6 +11429,7 @@
           <a:lstStyle/>
           <a:p>
             <a:pPr algn="ctr"/>
+            <a:endParaRPr/>
           </a:p>
         </p:txBody>
       </p:sp>
@@ -11667,6 +11575,7 @@
           <a:lstStyle/>
           <a:p>
             <a:pPr algn="ctr"/>
+            <a:endParaRPr/>
           </a:p>
         </p:txBody>
       </p:sp>
@@ -11715,6 +11624,7 @@
           <a:lstStyle/>
           <a:p>
             <a:pPr algn="ctr"/>
+            <a:endParaRPr/>
           </a:p>
         </p:txBody>
       </p:sp>
@@ -11860,6 +11770,7 @@
           <a:lstStyle/>
           <a:p>
             <a:pPr algn="ctr"/>
+            <a:endParaRPr/>
           </a:p>
         </p:txBody>
       </p:sp>
@@ -11906,6 +11817,7 @@
           <a:lstStyle/>
           <a:p>
             <a:pPr algn="ctr"/>
+            <a:endParaRPr/>
           </a:p>
         </p:txBody>
       </p:sp>
@@ -12080,6 +11992,7 @@
         <a:solidFill>
           <a:srgbClr val="FFFFFF"/>
         </a:solidFill>
+        <a:effectLst/>
       </p:bgPr>
     </p:bg>
     <p:spTree>
@@ -12117,7 +12030,7 @@
           <a:bodyPr wrap="square" rtlCol="0" anchor="ctr"/>
           <a:lstStyle/>
           <a:p>
-            <a:pPr indent="0" marL="0">
+            <a:pPr marL="0" indent="0">
               <a:buNone/>
             </a:pPr>
             <a:r>
@@ -12156,7 +12069,7 @@
           <a:bodyPr wrap="square" rtlCol="0" anchor="ctr"/>
           <a:lstStyle/>
           <a:p>
-            <a:pPr algn="r" indent="0" marL="0">
+            <a:pPr marL="0" indent="0" algn="r">
               <a:buNone/>
             </a:pPr>
             <a:r>
@@ -12195,11 +12108,11 @@
           <a:bodyPr wrap="square" rtlCol="0" anchor="ctr"/>
           <a:lstStyle/>
           <a:p>
-            <a:pPr indent="0" marL="0">
-              <a:buNone/>
-            </a:pPr>
-            <a:r>
-              <a:rPr lang="en-US" sz="1300" b="1" spc="200" kern="0" dirty="0">
+            <a:pPr marL="0" indent="0">
+              <a:buNone/>
+            </a:pPr>
+            <a:r>
+              <a:rPr lang="en-US" sz="1300" b="1" kern="0" spc="200" dirty="0">
                 <a:solidFill>
                   <a:srgbClr val="C9A24B"/>
                 </a:solidFill>
@@ -12234,7 +12147,7 @@
           <a:bodyPr wrap="square" rtlCol="0" anchor="ctr"/>
           <a:lstStyle/>
           <a:p>
-            <a:pPr indent="0" marL="0">
+            <a:pPr marL="0" indent="0">
               <a:buNone/>
             </a:pPr>
             <a:r>
@@ -12358,6 +12271,7 @@
           <a:lstStyle/>
           <a:p>
             <a:pPr algn="ctr"/>
+            <a:endParaRPr/>
           </a:p>
         </p:txBody>
       </p:sp>
@@ -12474,7 +12388,7 @@
           </a:fontRef>
         </p:style>
         <p:txBody>
-          <a:bodyPr rtlCol="0" anchor="ctr" wrap="square" lIns="146304" rIns="146304" tIns="73152" bIns="73152"/>
+          <a:bodyPr wrap="square" lIns="146304" tIns="73152" rIns="146304" bIns="73152" rtlCol="0" anchor="ctr"/>
           <a:lstStyle/>
           <a:p>
             <a:pPr algn="l">
@@ -12546,15 +12460,12 @@
                 <a:spcPct val="118000"/>
               </a:lnSpc>
             </a:pPr>
-            <a:r>
-              <a:rPr sz="1250">
-                <a:solidFill>
-                  <a:srgbClr val="D7F5C9"/>
-                </a:solidFill>
-                <a:latin typeface="Consolas"/>
-              </a:rPr>
-              <a:t/>
-            </a:r>
+            <a:endParaRPr sz="1250">
+              <a:solidFill>
+                <a:srgbClr val="D7F5C9"/>
+              </a:solidFill>
+              <a:latin typeface="Consolas"/>
+            </a:endParaRPr>
           </a:p>
           <a:p>
             <a:pPr algn="l">
@@ -12617,6 +12528,7 @@
           <a:lstStyle/>
           <a:p>
             <a:pPr algn="ctr"/>
+            <a:endParaRPr/>
           </a:p>
         </p:txBody>
       </p:sp>
@@ -12735,7 +12647,7 @@
           </a:fontRef>
         </p:style>
         <p:txBody>
-          <a:bodyPr rtlCol="0" anchor="ctr" wrap="square" lIns="146304" rIns="146304" tIns="73152" bIns="73152"/>
+          <a:bodyPr wrap="square" lIns="146304" tIns="73152" rIns="146304" bIns="73152" rtlCol="0" anchor="ctr"/>
           <a:lstStyle/>
           <a:p>
             <a:pPr algn="l">
@@ -12807,15 +12719,12 @@
                 <a:spcPct val="118000"/>
               </a:lnSpc>
             </a:pPr>
-            <a:r>
-              <a:rPr sz="1250">
-                <a:solidFill>
-                  <a:srgbClr val="D7F5C9"/>
-                </a:solidFill>
-                <a:latin typeface="Consolas"/>
-              </a:rPr>
-              <a:t/>
-            </a:r>
+            <a:endParaRPr sz="1250">
+              <a:solidFill>
+                <a:srgbClr val="D7F5C9"/>
+              </a:solidFill>
+              <a:latin typeface="Consolas"/>
+            </a:endParaRPr>
           </a:p>
           <a:p>
             <a:pPr algn="l">
@@ -12851,6 +12760,7 @@
         <a:solidFill>
           <a:srgbClr val="FFFFFF"/>
         </a:solidFill>
+        <a:effectLst/>
       </p:bgPr>
     </p:bg>
     <p:spTree>
@@ -12888,7 +12798,7 @@
           <a:bodyPr wrap="square" rtlCol="0" anchor="ctr"/>
           <a:lstStyle/>
           <a:p>
-            <a:pPr indent="0" marL="0">
+            <a:pPr marL="0" indent="0">
               <a:buNone/>
             </a:pPr>
             <a:r>
@@ -12927,7 +12837,7 @@
           <a:bodyPr wrap="square" rtlCol="0" anchor="ctr"/>
           <a:lstStyle/>
           <a:p>
-            <a:pPr algn="r" indent="0" marL="0">
+            <a:pPr marL="0" indent="0" algn="r">
               <a:buNone/>
             </a:pPr>
             <a:r>
@@ -12966,11 +12876,11 @@
           <a:bodyPr wrap="square" rtlCol="0" anchor="ctr"/>
           <a:lstStyle/>
           <a:p>
-            <a:pPr indent="0" marL="0">
-              <a:buNone/>
-            </a:pPr>
-            <a:r>
-              <a:rPr lang="en-US" sz="1300" b="1" spc="200" kern="0" dirty="0">
+            <a:pPr marL="0" indent="0">
+              <a:buNone/>
+            </a:pPr>
+            <a:r>
+              <a:rPr lang="en-US" sz="1300" b="1" kern="0" spc="200" dirty="0">
                 <a:solidFill>
                   <a:srgbClr val="C9A24B"/>
                 </a:solidFill>
@@ -13005,7 +12915,7 @@
           <a:bodyPr wrap="square" rtlCol="0" anchor="ctr"/>
           <a:lstStyle/>
           <a:p>
-            <a:pPr indent="0" marL="0">
+            <a:pPr marL="0" indent="0">
               <a:buNone/>
             </a:pPr>
             <a:r>
@@ -13044,7 +12954,7 @@
           <a:bodyPr wrap="square" rtlCol="0" anchor="t"/>
           <a:lstStyle/>
           <a:p>
-            <a:pPr indent="0" marL="0">
+            <a:pPr marL="0" indent="0">
               <a:lnSpc>
                 <a:spcPct val="125000"/>
               </a:lnSpc>
@@ -13086,7 +12996,10 @@
         </p:spPr>
         <p:txBody>
           <a:bodyPr/>
-          <a:p/>
+          <a:lstStyle/>
+          <a:p>
+            <a:endParaRPr/>
+          </a:p>
         </p:txBody>
       </p:sp>
       <p:sp>
@@ -13110,7 +13023,7 @@
           <a:bodyPr wrap="square" rtlCol="0" anchor="t"/>
           <a:lstStyle/>
           <a:p>
-            <a:pPr indent="0" marL="0">
+            <a:pPr marL="0" indent="0">
               <a:buNone/>
             </a:pPr>
             <a:r>
@@ -13149,7 +13062,10 @@
         </p:spPr>
         <p:txBody>
           <a:bodyPr/>
-          <a:p/>
+          <a:lstStyle/>
+          <a:p>
+            <a:endParaRPr/>
+          </a:p>
         </p:txBody>
       </p:sp>
       <p:sp>
@@ -13173,7 +13089,7 @@
           <a:bodyPr wrap="square" rtlCol="0" anchor="t"/>
           <a:lstStyle/>
           <a:p>
-            <a:pPr indent="0" marL="0">
+            <a:pPr marL="0" indent="0">
               <a:buNone/>
             </a:pPr>
             <a:r>
@@ -13212,7 +13128,10 @@
         </p:spPr>
         <p:txBody>
           <a:bodyPr/>
-          <a:p/>
+          <a:lstStyle/>
+          <a:p>
+            <a:endParaRPr/>
+          </a:p>
         </p:txBody>
       </p:sp>
       <p:sp>
@@ -13236,7 +13155,7 @@
           <a:bodyPr wrap="square" rtlCol="0" anchor="t"/>
           <a:lstStyle/>
           <a:p>
-            <a:pPr indent="0" marL="0">
+            <a:pPr marL="0" indent="0">
               <a:buNone/>
             </a:pPr>
             <a:r>
@@ -13277,7 +13196,10 @@
         </p:spPr>
         <p:txBody>
           <a:bodyPr/>
-          <a:p/>
+          <a:lstStyle/>
+          <a:p>
+            <a:endParaRPr/>
+          </a:p>
         </p:txBody>
       </p:sp>
       <p:sp>
@@ -13301,7 +13223,7 @@
           <a:bodyPr wrap="square" rtlCol="0" anchor="ctr"/>
           <a:lstStyle/>
           <a:p>
-            <a:pPr indent="0" marL="0">
+            <a:pPr marL="0" indent="0">
               <a:buNone/>
             </a:pPr>
             <a:r>
@@ -13340,7 +13262,7 @@
           <a:bodyPr wrap="square" rtlCol="0" anchor="t"/>
           <a:lstStyle/>
           <a:p>
-            <a:pPr indent="0" marL="0">
+            <a:pPr marL="0" indent="0">
               <a:lnSpc>
                 <a:spcPct val="130000"/>
               </a:lnSpc>
@@ -13360,7 +13282,7 @@
             <a:endParaRPr lang="en-US" sz="1200" dirty="0"/>
           </a:p>
           <a:p>
-            <a:pPr indent="0" marL="0">
+            <a:pPr marL="0" indent="0">
               <a:lnSpc>
                 <a:spcPct val="130000"/>
               </a:lnSpc>
@@ -13380,7 +13302,7 @@
             <a:endParaRPr lang="en-US" sz="1200" dirty="0"/>
           </a:p>
           <a:p>
-            <a:pPr indent="0" marL="0">
+            <a:pPr marL="0" indent="0">
               <a:lnSpc>
                 <a:spcPct val="130000"/>
               </a:lnSpc>
@@ -13400,7 +13322,7 @@
             <a:endParaRPr lang="en-US" sz="1200" dirty="0"/>
           </a:p>
           <a:p>
-            <a:pPr indent="0" marL="0">
+            <a:pPr marL="0" indent="0">
               <a:lnSpc>
                 <a:spcPct val="130000"/>
               </a:lnSpc>
@@ -13409,7 +13331,7 @@
             <a:endParaRPr lang="en-US" sz="1200" dirty="0"/>
           </a:p>
           <a:p>
-            <a:pPr indent="0" marL="0">
+            <a:pPr marL="0" indent="0">
               <a:lnSpc>
                 <a:spcPct val="130000"/>
               </a:lnSpc>
@@ -13429,7 +13351,7 @@
             <a:endParaRPr lang="en-US" sz="1200" dirty="0"/>
           </a:p>
           <a:p>
-            <a:pPr indent="0" marL="0">
+            <a:pPr marL="0" indent="0">
               <a:lnSpc>
                 <a:spcPct val="130000"/>
               </a:lnSpc>
@@ -13449,7 +13371,7 @@
             <a:endParaRPr lang="en-US" sz="1200" dirty="0"/>
           </a:p>
           <a:p>
-            <a:pPr indent="0" marL="0">
+            <a:pPr marL="0" indent="0">
               <a:lnSpc>
                 <a:spcPct val="130000"/>
               </a:lnSpc>
@@ -13458,7 +13380,7 @@
             <a:endParaRPr lang="en-US" sz="1200" dirty="0"/>
           </a:p>
           <a:p>
-            <a:pPr indent="0" marL="0">
+            <a:pPr marL="0" indent="0">
               <a:lnSpc>
                 <a:spcPct val="130000"/>
               </a:lnSpc>
@@ -13478,7 +13400,7 @@
             <a:endParaRPr lang="en-US" sz="1200" dirty="0"/>
           </a:p>
           <a:p>
-            <a:pPr indent="0" marL="0">
+            <a:pPr marL="0" indent="0">
               <a:lnSpc>
                 <a:spcPct val="130000"/>
               </a:lnSpc>
@@ -13498,7 +13420,7 @@
             <a:endParaRPr lang="en-US" sz="1200" dirty="0"/>
           </a:p>
           <a:p>
-            <a:pPr indent="0" marL="0">
+            <a:pPr marL="0" indent="0">
               <a:lnSpc>
                 <a:spcPct val="130000"/>
               </a:lnSpc>
@@ -13518,7 +13440,7 @@
             <a:endParaRPr lang="en-US" sz="1200" dirty="0"/>
           </a:p>
           <a:p>
-            <a:pPr indent="0" marL="0">
+            <a:pPr marL="0" indent="0">
               <a:lnSpc>
                 <a:spcPct val="130000"/>
               </a:lnSpc>
@@ -13527,7 +13449,7 @@
             <a:endParaRPr lang="en-US" sz="1200" dirty="0"/>
           </a:p>
           <a:p>
-            <a:pPr indent="0" marL="0">
+            <a:pPr marL="0" indent="0">
               <a:lnSpc>
                 <a:spcPct val="130000"/>
               </a:lnSpc>
@@ -13547,7 +13469,7 @@
             <a:endParaRPr lang="en-US" sz="1200" dirty="0"/>
           </a:p>
           <a:p>
-            <a:pPr indent="0" marL="0">
+            <a:pPr marL="0" indent="0">
               <a:lnSpc>
                 <a:spcPct val="130000"/>
               </a:lnSpc>
@@ -13608,6 +13530,7 @@
         <a:solidFill>
           <a:srgbClr val="FFFFFF"/>
         </a:solidFill>
+        <a:effectLst/>
       </p:bgPr>
     </p:bg>
     <p:spTree>
@@ -13645,7 +13568,7 @@
           <a:bodyPr wrap="square" rtlCol="0" anchor="ctr"/>
           <a:lstStyle/>
           <a:p>
-            <a:pPr indent="0" marL="0">
+            <a:pPr marL="0" indent="0">
               <a:buNone/>
             </a:pPr>
             <a:r>
@@ -13684,7 +13607,7 @@
           <a:bodyPr wrap="square" rtlCol="0" anchor="ctr"/>
           <a:lstStyle/>
           <a:p>
-            <a:pPr algn="r" indent="0" marL="0">
+            <a:pPr marL="0" indent="0" algn="r">
               <a:buNone/>
             </a:pPr>
             <a:r>
@@ -13723,11 +13646,11 @@
           <a:bodyPr wrap="square" rtlCol="0" anchor="ctr"/>
           <a:lstStyle/>
           <a:p>
-            <a:pPr indent="0" marL="0">
-              <a:buNone/>
-            </a:pPr>
-            <a:r>
-              <a:rPr lang="en-US" sz="1300" b="1" spc="200" kern="0" dirty="0">
+            <a:pPr marL="0" indent="0">
+              <a:buNone/>
+            </a:pPr>
+            <a:r>
+              <a:rPr lang="en-US" sz="1300" b="1" kern="0" spc="200" dirty="0">
                 <a:solidFill>
                   <a:srgbClr val="C9A24B"/>
                 </a:solidFill>
@@ -13762,7 +13685,7 @@
           <a:bodyPr wrap="square" rtlCol="0" anchor="ctr"/>
           <a:lstStyle/>
           <a:p>
-            <a:pPr indent="0" marL="0">
+            <a:pPr marL="0" indent="0">
               <a:buNone/>
             </a:pPr>
             <a:r>
@@ -13886,6 +13809,7 @@
           <a:lstStyle/>
           <a:p>
             <a:pPr algn="ctr"/>
+            <a:endParaRPr/>
           </a:p>
         </p:txBody>
       </p:sp>
@@ -14096,6 +14020,7 @@
           <a:lstStyle/>
           <a:p>
             <a:pPr algn="ctr"/>
+            <a:endParaRPr/>
           </a:p>
         </p:txBody>
       </p:sp>
@@ -14302,6 +14227,7 @@
           <a:lstStyle/>
           <a:p>
             <a:pPr algn="ctr"/>
+            <a:endParaRPr/>
           </a:p>
         </p:txBody>
       </p:sp>
@@ -14473,8 +14399,8 @@
         </p:nvCxnSpPr>
         <p:spPr>
           <a:xfrm flipH="1">
-            <a:off x="2948940.0" y="3657600"/>
-            <a:ext cx="1915668.0" cy="777240"/>
+            <a:off x="0" y="3657600"/>
+            <a:ext cx="0" cy="777240"/>
           </a:xfrm>
           <a:prstGeom prst="line">
             <a:avLst/>
@@ -14510,7 +14436,7 @@
         <p:spPr>
           <a:xfrm>
             <a:off x="7333488" y="3657600"/>
-            <a:ext cx="1924812.0" cy="777240"/>
+            <a:ext cx="0" cy="777240"/>
           </a:xfrm>
           <a:prstGeom prst="line">
             <a:avLst/>
@@ -14553,6 +14479,7 @@
         <a:solidFill>
           <a:srgbClr val="FFFFFF"/>
         </a:solidFill>
+        <a:effectLst/>
       </p:bgPr>
     </p:bg>
     <p:spTree>
@@ -14590,7 +14517,7 @@
           <a:bodyPr wrap="square" rtlCol="0" anchor="ctr"/>
           <a:lstStyle/>
           <a:p>
-            <a:pPr indent="0" marL="0">
+            <a:pPr marL="0" indent="0">
               <a:buNone/>
             </a:pPr>
             <a:r>
@@ -14629,7 +14556,7 @@
           <a:bodyPr wrap="square" rtlCol="0" anchor="ctr"/>
           <a:lstStyle/>
           <a:p>
-            <a:pPr algn="r" indent="0" marL="0">
+            <a:pPr marL="0" indent="0" algn="r">
               <a:buNone/>
             </a:pPr>
             <a:r>
@@ -14668,11 +14595,11 @@
           <a:bodyPr wrap="square" rtlCol="0" anchor="ctr"/>
           <a:lstStyle/>
           <a:p>
-            <a:pPr indent="0" marL="0">
-              <a:buNone/>
-            </a:pPr>
-            <a:r>
-              <a:rPr lang="en-US" sz="1300" b="1" spc="200" kern="0" dirty="0">
+            <a:pPr marL="0" indent="0">
+              <a:buNone/>
+            </a:pPr>
+            <a:r>
+              <a:rPr lang="en-US" sz="1300" b="1" kern="0" spc="200" dirty="0">
                 <a:solidFill>
                   <a:srgbClr val="C9A24B"/>
                 </a:solidFill>
@@ -14707,7 +14634,7 @@
           <a:bodyPr wrap="square" rtlCol="0" anchor="ctr"/>
           <a:lstStyle/>
           <a:p>
-            <a:pPr indent="0" marL="0">
+            <a:pPr marL="0" indent="0">
               <a:buNone/>
             </a:pPr>
             <a:r>
@@ -14829,6 +14756,7 @@
           <a:lstStyle/>
           <a:p>
             <a:pPr algn="ctr"/>
+            <a:endParaRPr/>
           </a:p>
         </p:txBody>
       </p:sp>
@@ -14912,6 +14840,7 @@
           <a:lstStyle/>
           <a:p>
             <a:pPr algn="ctr"/>
+            <a:endParaRPr/>
           </a:p>
         </p:txBody>
       </p:sp>
@@ -14995,6 +14924,7 @@
           <a:lstStyle/>
           <a:p>
             <a:pPr algn="ctr"/>
+            <a:endParaRPr/>
           </a:p>
         </p:txBody>
       </p:sp>
@@ -15080,6 +15010,7 @@
           <a:lstStyle/>
           <a:p>
             <a:pPr algn="ctr"/>
+            <a:endParaRPr/>
           </a:p>
         </p:txBody>
       </p:sp>
@@ -15186,15 +15117,12 @@
                 <a:spcPts val="0"/>
               </a:spcAft>
             </a:pPr>
-            <a:r>
-              <a:rPr sz="1150" b="0" i="0">
-                <a:solidFill>
-                  <a:srgbClr val="D7F5C9"/>
-                </a:solidFill>
-                <a:latin typeface="Consolas"/>
-              </a:rPr>
-              <a:t/>
-            </a:r>
+            <a:endParaRPr sz="1150" b="0" i="0">
+              <a:solidFill>
+                <a:srgbClr val="D7F5C9"/>
+              </a:solidFill>
+              <a:latin typeface="Consolas"/>
+            </a:endParaRPr>
           </a:p>
           <a:p>
             <a:pPr algn="l">
@@ -15281,15 +15209,12 @@
                 <a:spcPts val="0"/>
               </a:spcAft>
             </a:pPr>
-            <a:r>
-              <a:rPr sz="1150" b="0" i="0">
-                <a:solidFill>
-                  <a:srgbClr val="D7F5C9"/>
-                </a:solidFill>
-                <a:latin typeface="Consolas"/>
-              </a:rPr>
-              <a:t/>
-            </a:r>
+            <a:endParaRPr sz="1150" b="0" i="0">
+              <a:solidFill>
+                <a:srgbClr val="D7F5C9"/>
+              </a:solidFill>
+              <a:latin typeface="Consolas"/>
+            </a:endParaRPr>
           </a:p>
           <a:p>
             <a:pPr algn="l">
@@ -15347,6 +15272,7 @@
         <a:solidFill>
           <a:srgbClr val="FFFFFF"/>
         </a:solidFill>
+        <a:effectLst/>
       </p:bgPr>
     </p:bg>
     <p:spTree>
@@ -15384,7 +15310,7 @@
           <a:bodyPr wrap="square" rtlCol="0" anchor="ctr"/>
           <a:lstStyle/>
           <a:p>
-            <a:pPr indent="0" marL="0">
+            <a:pPr marL="0" indent="0">
               <a:buNone/>
             </a:pPr>
             <a:r>
@@ -15423,7 +15349,7 @@
           <a:bodyPr wrap="square" rtlCol="0" anchor="ctr"/>
           <a:lstStyle/>
           <a:p>
-            <a:pPr algn="r" indent="0" marL="0">
+            <a:pPr marL="0" indent="0" algn="r">
               <a:buNone/>
             </a:pPr>
             <a:r>
@@ -15462,11 +15388,11 @@
           <a:bodyPr wrap="square" rtlCol="0" anchor="ctr"/>
           <a:lstStyle/>
           <a:p>
-            <a:pPr indent="0" marL="0">
-              <a:buNone/>
-            </a:pPr>
-            <a:r>
-              <a:rPr lang="en-US" sz="1300" b="1" spc="200" kern="0" dirty="0">
+            <a:pPr marL="0" indent="0">
+              <a:buNone/>
+            </a:pPr>
+            <a:r>
+              <a:rPr lang="en-US" sz="1300" b="1" kern="0" spc="200" dirty="0">
                 <a:solidFill>
                   <a:srgbClr val="C9A24B"/>
                 </a:solidFill>
@@ -15501,7 +15427,7 @@
           <a:bodyPr wrap="square" rtlCol="0" anchor="ctr"/>
           <a:lstStyle/>
           <a:p>
-            <a:pPr indent="0" marL="0">
+            <a:pPr marL="0" indent="0">
               <a:buNone/>
             </a:pPr>
             <a:r>
@@ -15547,7 +15473,10 @@
         </p:spPr>
         <p:txBody>
           <a:bodyPr/>
-          <a:p/>
+          <a:lstStyle/>
+          <a:p>
+            <a:endParaRPr/>
+          </a:p>
         </p:txBody>
       </p:sp>
       <p:sp>
@@ -15571,11 +15500,11 @@
           <a:bodyPr wrap="square" rtlCol="0" anchor="ctr"/>
           <a:lstStyle/>
           <a:p>
-            <a:pPr indent="0" marL="0">
-              <a:buNone/>
-            </a:pPr>
-            <a:r>
-              <a:rPr lang="en-US" sz="1050" b="1" spc="100" kern="0" dirty="0">
+            <a:pPr marL="0" indent="0">
+              <a:buNone/>
+            </a:pPr>
+            <a:r>
+              <a:rPr lang="en-US" sz="1050" b="1" kern="0" spc="100" dirty="0">
                 <a:solidFill>
                   <a:srgbClr val="2E7D5B"/>
                 </a:solidFill>
@@ -15610,7 +15539,7 @@
           <a:bodyPr wrap="square" rtlCol="0" anchor="t"/>
           <a:lstStyle/>
           <a:p>
-            <a:pPr indent="0" marL="0">
+            <a:pPr marL="0" indent="0">
               <a:buNone/>
             </a:pPr>
             <a:r>
@@ -15649,11 +15578,11 @@
           <a:bodyPr wrap="square" rtlCol="0" anchor="ctr"/>
           <a:lstStyle/>
           <a:p>
-            <a:pPr indent="0" marL="0">
-              <a:buNone/>
-            </a:pPr>
-            <a:r>
-              <a:rPr lang="en-US" sz="1100" b="1" spc="100" kern="0" dirty="0">
+            <a:pPr marL="0" indent="0">
+              <a:buNone/>
+            </a:pPr>
+            <a:r>
+              <a:rPr lang="en-US" sz="1100" b="1" kern="0" spc="100" dirty="0">
                 <a:solidFill>
                   <a:srgbClr val="5B6472"/>
                 </a:solidFill>
@@ -15688,7 +15617,10 @@
         </p:spPr>
         <p:txBody>
           <a:bodyPr/>
-          <a:p/>
+          <a:lstStyle/>
+          <a:p>
+            <a:endParaRPr/>
+          </a:p>
         </p:txBody>
       </p:sp>
       <p:sp>
@@ -15712,7 +15644,7 @@
           <a:bodyPr wrap="square" rtlCol="0" anchor="t"/>
           <a:lstStyle/>
           <a:p>
-            <a:pPr indent="0" marL="0">
+            <a:pPr marL="0" indent="0">
               <a:buNone/>
             </a:pPr>
             <a:r>
@@ -15751,7 +15683,10 @@
         </p:spPr>
         <p:txBody>
           <a:bodyPr/>
-          <a:p/>
+          <a:lstStyle/>
+          <a:p>
+            <a:endParaRPr/>
+          </a:p>
         </p:txBody>
       </p:sp>
       <p:sp>
@@ -15775,7 +15710,7 @@
           <a:bodyPr wrap="square" rtlCol="0" anchor="t"/>
           <a:lstStyle/>
           <a:p>
-            <a:pPr indent="0" marL="0">
+            <a:pPr marL="0" indent="0">
               <a:buNone/>
             </a:pPr>
             <a:r>
@@ -15814,7 +15749,10 @@
         </p:spPr>
         <p:txBody>
           <a:bodyPr/>
-          <a:p/>
+          <a:lstStyle/>
+          <a:p>
+            <a:endParaRPr/>
+          </a:p>
         </p:txBody>
       </p:sp>
       <p:sp>
@@ -15838,7 +15776,7 @@
           <a:bodyPr wrap="square" rtlCol="0" anchor="t"/>
           <a:lstStyle/>
           <a:p>
-            <a:pPr indent="0" marL="0">
+            <a:pPr marL="0" indent="0">
               <a:buNone/>
             </a:pPr>
             <a:r>
@@ -15877,7 +15815,10 @@
         </p:spPr>
         <p:txBody>
           <a:bodyPr/>
-          <a:p/>
+          <a:lstStyle/>
+          <a:p>
+            <a:endParaRPr/>
+          </a:p>
         </p:txBody>
       </p:sp>
       <p:sp>
@@ -15901,7 +15842,7 @@
           <a:bodyPr wrap="square" rtlCol="0" anchor="t"/>
           <a:lstStyle/>
           <a:p>
-            <a:pPr indent="0" marL="0">
+            <a:pPr marL="0" indent="0">
               <a:buNone/>
             </a:pPr>
             <a:r>
@@ -15940,7 +15881,10 @@
         </p:spPr>
         <p:txBody>
           <a:bodyPr/>
-          <a:p/>
+          <a:lstStyle/>
+          <a:p>
+            <a:endParaRPr/>
+          </a:p>
         </p:txBody>
       </p:sp>
       <p:sp>
@@ -15964,7 +15908,7 @@
           <a:bodyPr wrap="square" rtlCol="0" anchor="t"/>
           <a:lstStyle/>
           <a:p>
-            <a:pPr indent="0" marL="0">
+            <a:pPr marL="0" indent="0">
               <a:buNone/>
             </a:pPr>
             <a:r>
@@ -16005,7 +15949,10 @@
         </p:spPr>
         <p:txBody>
           <a:bodyPr/>
-          <a:p/>
+          <a:lstStyle/>
+          <a:p>
+            <a:endParaRPr/>
+          </a:p>
         </p:txBody>
       </p:sp>
       <p:sp>
@@ -16029,7 +15976,7 @@
           <a:bodyPr wrap="square" rtlCol="0" anchor="ctr"/>
           <a:lstStyle/>
           <a:p>
-            <a:pPr indent="0" marL="0">
+            <a:pPr marL="0" indent="0">
               <a:buNone/>
             </a:pPr>
             <a:r>
@@ -16068,7 +16015,7 @@
           <a:bodyPr wrap="square" rtlCol="0" anchor="t"/>
           <a:lstStyle/>
           <a:p>
-            <a:pPr indent="0" marL="0">
+            <a:pPr marL="0" indent="0">
               <a:lnSpc>
                 <a:spcPct val="140000"/>
               </a:lnSpc>
@@ -16088,7 +16035,7 @@
             <a:endParaRPr lang="en-US" sz="1300" dirty="0"/>
           </a:p>
           <a:p>
-            <a:pPr indent="0" marL="0">
+            <a:pPr marL="0" indent="0">
               <a:lnSpc>
                 <a:spcPct val="140000"/>
               </a:lnSpc>
@@ -16108,7 +16055,7 @@
             <a:endParaRPr lang="en-US" sz="1300" dirty="0"/>
           </a:p>
           <a:p>
-            <a:pPr indent="0" marL="0">
+            <a:pPr marL="0" indent="0">
               <a:lnSpc>
                 <a:spcPct val="140000"/>
               </a:lnSpc>
@@ -16128,7 +16075,7 @@
             <a:endParaRPr lang="en-US" sz="1300" dirty="0"/>
           </a:p>
           <a:p>
-            <a:pPr indent="0" marL="0">
+            <a:pPr marL="0" indent="0">
               <a:lnSpc>
                 <a:spcPct val="140000"/>
               </a:lnSpc>
@@ -16148,7 +16095,7 @@
             <a:endParaRPr lang="en-US" sz="1300" dirty="0"/>
           </a:p>
           <a:p>
-            <a:pPr indent="0" marL="0">
+            <a:pPr marL="0" indent="0">
               <a:lnSpc>
                 <a:spcPct val="140000"/>
               </a:lnSpc>
@@ -16157,7 +16104,7 @@
             <a:endParaRPr lang="en-US" sz="1300" dirty="0"/>
           </a:p>
           <a:p>
-            <a:pPr indent="0" marL="0">
+            <a:pPr marL="0" indent="0">
               <a:lnSpc>
                 <a:spcPct val="140000"/>
               </a:lnSpc>
@@ -16177,7 +16124,7 @@
             <a:endParaRPr lang="en-US" sz="1300" dirty="0"/>
           </a:p>
           <a:p>
-            <a:pPr indent="0" marL="0">
+            <a:pPr marL="0" indent="0">
               <a:lnSpc>
                 <a:spcPct val="140000"/>
               </a:lnSpc>
@@ -16197,7 +16144,7 @@
             <a:endParaRPr lang="en-US" sz="1300" dirty="0"/>
           </a:p>
           <a:p>
-            <a:pPr indent="0" marL="0">
+            <a:pPr marL="0" indent="0">
               <a:lnSpc>
                 <a:spcPct val="140000"/>
               </a:lnSpc>
@@ -16206,7 +16153,7 @@
             <a:endParaRPr lang="en-US" sz="1300" dirty="0"/>
           </a:p>
           <a:p>
-            <a:pPr indent="0" marL="0">
+            <a:pPr marL="0" indent="0">
               <a:lnSpc>
                 <a:spcPct val="140000"/>
               </a:lnSpc>
@@ -16226,7 +16173,7 @@
             <a:endParaRPr lang="en-US" sz="1300" dirty="0"/>
           </a:p>
           <a:p>
-            <a:pPr indent="0" marL="0">
+            <a:pPr marL="0" indent="0">
               <a:lnSpc>
                 <a:spcPct val="140000"/>
               </a:lnSpc>
@@ -16548,4 +16495,319 @@
     </a:ext>
   </a:extLst>
 </a:theme>
+</file>
+
+<file path=ppt/theme/theme2.xml><?xml version="1.0" encoding="utf-8"?>
+<a:theme xmlns:a="http://schemas.openxmlformats.org/drawingml/2006/main" name="Tema de Office">
+  <a:themeElements>
+    <a:clrScheme name="Office">
+      <a:dk1>
+        <a:sysClr val="windowText" lastClr="000000"/>
+      </a:dk1>
+      <a:lt1>
+        <a:sysClr val="window" lastClr="FFFFFF"/>
+      </a:lt1>
+      <a:dk2>
+        <a:srgbClr val="0E2841"/>
+      </a:dk2>
+      <a:lt2>
+        <a:srgbClr val="E8E8E8"/>
+      </a:lt2>
+      <a:accent1>
+        <a:srgbClr val="156082"/>
+      </a:accent1>
+      <a:accent2>
+        <a:srgbClr val="E97132"/>
+      </a:accent2>
+      <a:accent3>
+        <a:srgbClr val="196B24"/>
+      </a:accent3>
+      <a:accent4>
+        <a:srgbClr val="0F9ED5"/>
+      </a:accent4>
+      <a:accent5>
+        <a:srgbClr val="A02B93"/>
+      </a:accent5>
+      <a:accent6>
+        <a:srgbClr val="4EA72E"/>
+      </a:accent6>
+      <a:hlink>
+        <a:srgbClr val="467886"/>
+      </a:hlink>
+      <a:folHlink>
+        <a:srgbClr val="96607D"/>
+      </a:folHlink>
+    </a:clrScheme>
+    <a:fontScheme name="Office">
+      <a:majorFont>
+        <a:latin typeface="Aptos Display" panose="02110004020202020204"/>
+        <a:ea typeface=""/>
+        <a:cs typeface=""/>
+        <a:font script="Jpan" typeface="游ゴシック Light"/>
+        <a:font script="Hang" typeface="맑은 고딕"/>
+        <a:font script="Hans" typeface="等线 Light"/>
+        <a:font script="Hant" typeface="新細明體"/>
+        <a:font script="Arab" typeface="Times New Roman"/>
+        <a:font script="Hebr" typeface="Times New Roman"/>
+        <a:font script="Thai" typeface="Angsana New"/>
+        <a:font script="Ethi" typeface="Nyala"/>
+        <a:font script="Beng" typeface="Vrinda"/>
+        <a:font script="Gujr" typeface="Shruti"/>
+        <a:font script="Khmr" typeface="MoolBoran"/>
+        <a:font script="Knda" typeface="Tunga"/>
+        <a:font script="Guru" typeface="Raavi"/>
+        <a:font script="Cans" typeface="Euphemia"/>
+        <a:font script="Cher" typeface="Plantagenet Cherokee"/>
+        <a:font script="Yiii" typeface="Microsoft Yi Baiti"/>
+        <a:font script="Tibt" typeface="Microsoft Himalaya"/>
+        <a:font script="Thaa" typeface="MV Boli"/>
+        <a:font script="Deva" typeface="Mangal"/>
+        <a:font script="Telu" typeface="Gautami"/>
+        <a:font script="Taml" typeface="Latha"/>
+        <a:font script="Syrc" typeface="Estrangelo Edessa"/>
+        <a:font script="Orya" typeface="Kalinga"/>
+        <a:font script="Mlym" typeface="Kartika"/>
+        <a:font script="Laoo" typeface="DokChampa"/>
+        <a:font script="Sinh" typeface="Iskoola Pota"/>
+        <a:font script="Mong" typeface="Mongolian Baiti"/>
+        <a:font script="Viet" typeface="Times New Roman"/>
+        <a:font script="Uigh" typeface="Microsoft Uighur"/>
+        <a:font script="Geor" typeface="Sylfaen"/>
+        <a:font script="Armn" typeface="Arial"/>
+        <a:font script="Bugi" typeface="Leelawadee UI"/>
+        <a:font script="Bopo" typeface="Microsoft JhengHei"/>
+        <a:font script="Java" typeface="Javanese Text"/>
+        <a:font script="Lisu" typeface="Segoe UI"/>
+        <a:font script="Mymr" typeface="Myanmar Text"/>
+        <a:font script="Nkoo" typeface="Ebrima"/>
+        <a:font script="Olck" typeface="Nirmala UI"/>
+        <a:font script="Osma" typeface="Ebrima"/>
+        <a:font script="Phag" typeface="Phagspa"/>
+        <a:font script="Syrn" typeface="Estrangelo Edessa"/>
+        <a:font script="Syrj" typeface="Estrangelo Edessa"/>
+        <a:font script="Syre" typeface="Estrangelo Edessa"/>
+        <a:font script="Sora" typeface="Nirmala UI"/>
+        <a:font script="Tale" typeface="Microsoft Tai Le"/>
+        <a:font script="Talu" typeface="Microsoft New Tai Lue"/>
+        <a:font script="Tfng" typeface="Ebrima"/>
+      </a:majorFont>
+      <a:minorFont>
+        <a:latin typeface="Aptos" panose="02110004020202020204"/>
+        <a:ea typeface=""/>
+        <a:cs typeface=""/>
+        <a:font script="Jpan" typeface="游ゴシック"/>
+        <a:font script="Hang" typeface="맑은 고딕"/>
+        <a:font script="Hans" typeface="等线"/>
+        <a:font script="Hant" typeface="新細明體"/>
+        <a:font script="Arab" typeface="Arial"/>
+        <a:font script="Hebr" typeface="Arial"/>
+        <a:font script="Thai" typeface="Cordia New"/>
+        <a:font script="Ethi" typeface="Nyala"/>
+        <a:font script="Beng" typeface="Vrinda"/>
+        <a:font script="Gujr" typeface="Shruti"/>
+        <a:font script="Khmr" typeface="DaunPenh"/>
+        <a:font script="Knda" typeface="Tunga"/>
+        <a:font script="Guru" typeface="Raavi"/>
+        <a:font script="Cans" typeface="Euphemia"/>
+        <a:font script="Cher" typeface="Plantagenet Cherokee"/>
+        <a:font script="Yiii" typeface="Microsoft Yi Baiti"/>
+        <a:font script="Tibt" typeface="Microsoft Himalaya"/>
+        <a:font script="Thaa" typeface="MV Boli"/>
+        <a:font script="Deva" typeface="Mangal"/>
+        <a:font script="Telu" typeface="Gautami"/>
+        <a:font script="Taml" typeface="Latha"/>
+        <a:font script="Syrc" typeface="Estrangelo Edessa"/>
+        <a:font script="Orya" typeface="Kalinga"/>
+        <a:font script="Mlym" typeface="Kartika"/>
+        <a:font script="Laoo" typeface="DokChampa"/>
+        <a:font script="Sinh" typeface="Iskoola Pota"/>
+        <a:font script="Mong" typeface="Mongolian Baiti"/>
+        <a:font script="Viet" typeface="Arial"/>
+        <a:font script="Uigh" typeface="Microsoft Uighur"/>
+        <a:font script="Geor" typeface="Sylfaen"/>
+        <a:font script="Armn" typeface="Arial"/>
+        <a:font script="Bugi" typeface="Leelawadee UI"/>
+        <a:font script="Bopo" typeface="Microsoft JhengHei"/>
+        <a:font script="Java" typeface="Javanese Text"/>
+        <a:font script="Lisu" typeface="Segoe UI"/>
+        <a:font script="Mymr" typeface="Myanmar Text"/>
+        <a:font script="Nkoo" typeface="Ebrima"/>
+        <a:font script="Olck" typeface="Nirmala UI"/>
+        <a:font script="Osma" typeface="Ebrima"/>
+        <a:font script="Phag" typeface="Phagspa"/>
+        <a:font script="Syrn" typeface="Estrangelo Edessa"/>
+        <a:font script="Syrj" typeface="Estrangelo Edessa"/>
+        <a:font script="Syre" typeface="Estrangelo Edessa"/>
+        <a:font script="Sora" typeface="Nirmala UI"/>
+        <a:font script="Tale" typeface="Microsoft Tai Le"/>
+        <a:font script="Talu" typeface="Microsoft New Tai Lue"/>
+        <a:font script="Tfng" typeface="Ebrima"/>
+      </a:minorFont>
+    </a:fontScheme>
+    <a:fmtScheme name="Office">
+      <a:fillStyleLst>
+        <a:solidFill>
+          <a:schemeClr val="phClr"/>
+        </a:solidFill>
+        <a:gradFill rotWithShape="1">
+          <a:gsLst>
+            <a:gs pos="0">
+              <a:schemeClr val="phClr">
+                <a:lumMod val="110000"/>
+                <a:satMod val="105000"/>
+                <a:tint val="67000"/>
+              </a:schemeClr>
+            </a:gs>
+            <a:gs pos="50000">
+              <a:schemeClr val="phClr">
+                <a:lumMod val="105000"/>
+                <a:satMod val="103000"/>
+                <a:tint val="73000"/>
+              </a:schemeClr>
+            </a:gs>
+            <a:gs pos="100000">
+              <a:schemeClr val="phClr">
+                <a:lumMod val="105000"/>
+                <a:satMod val="109000"/>
+                <a:tint val="81000"/>
+              </a:schemeClr>
+            </a:gs>
+          </a:gsLst>
+          <a:lin ang="5400000" scaled="0"/>
+        </a:gradFill>
+        <a:gradFill rotWithShape="1">
+          <a:gsLst>
+            <a:gs pos="0">
+              <a:schemeClr val="phClr">
+                <a:satMod val="103000"/>
+                <a:lumMod val="102000"/>
+                <a:tint val="94000"/>
+              </a:schemeClr>
+            </a:gs>
+            <a:gs pos="50000">
+              <a:schemeClr val="phClr">
+                <a:satMod val="110000"/>
+                <a:lumMod val="100000"/>
+                <a:shade val="100000"/>
+              </a:schemeClr>
+            </a:gs>
+            <a:gs pos="100000">
+              <a:schemeClr val="phClr">
+                <a:lumMod val="99000"/>
+                <a:satMod val="120000"/>
+                <a:shade val="78000"/>
+              </a:schemeClr>
+            </a:gs>
+          </a:gsLst>
+          <a:lin ang="5400000" scaled="0"/>
+        </a:gradFill>
+      </a:fillStyleLst>
+      <a:lnStyleLst>
+        <a:ln w="12700" cap="flat" cmpd="sng" algn="ctr">
+          <a:solidFill>
+            <a:schemeClr val="phClr"/>
+          </a:solidFill>
+          <a:prstDash val="solid"/>
+          <a:miter lim="800000"/>
+        </a:ln>
+        <a:ln w="19050" cap="flat" cmpd="sng" algn="ctr">
+          <a:solidFill>
+            <a:schemeClr val="phClr"/>
+          </a:solidFill>
+          <a:prstDash val="solid"/>
+          <a:miter lim="800000"/>
+        </a:ln>
+        <a:ln w="25400" cap="flat" cmpd="sng" algn="ctr">
+          <a:solidFill>
+            <a:schemeClr val="phClr"/>
+          </a:solidFill>
+          <a:prstDash val="solid"/>
+          <a:miter lim="800000"/>
+        </a:ln>
+      </a:lnStyleLst>
+      <a:effectStyleLst>
+        <a:effectStyle>
+          <a:effectLst/>
+        </a:effectStyle>
+        <a:effectStyle>
+          <a:effectLst/>
+        </a:effectStyle>
+        <a:effectStyle>
+          <a:effectLst>
+            <a:outerShdw blurRad="57150" dist="19050" dir="5400000" algn="ctr" rotWithShape="0">
+              <a:srgbClr val="000000">
+                <a:alpha val="63000"/>
+              </a:srgbClr>
+            </a:outerShdw>
+          </a:effectLst>
+        </a:effectStyle>
+      </a:effectStyleLst>
+      <a:bgFillStyleLst>
+        <a:solidFill>
+          <a:schemeClr val="phClr"/>
+        </a:solidFill>
+        <a:solidFill>
+          <a:schemeClr val="phClr">
+            <a:tint val="95000"/>
+            <a:satMod val="170000"/>
+          </a:schemeClr>
+        </a:solidFill>
+        <a:gradFill rotWithShape="1">
+          <a:gsLst>
+            <a:gs pos="0">
+              <a:schemeClr val="phClr">
+                <a:tint val="93000"/>
+                <a:satMod val="150000"/>
+                <a:shade val="98000"/>
+                <a:lumMod val="102000"/>
+              </a:schemeClr>
+            </a:gs>
+            <a:gs pos="50000">
+              <a:schemeClr val="phClr">
+                <a:tint val="98000"/>
+                <a:satMod val="130000"/>
+                <a:shade val="90000"/>
+                <a:lumMod val="103000"/>
+              </a:schemeClr>
+            </a:gs>
+            <a:gs pos="100000">
+              <a:schemeClr val="phClr">
+                <a:shade val="63000"/>
+                <a:satMod val="120000"/>
+              </a:schemeClr>
+            </a:gs>
+          </a:gsLst>
+          <a:lin ang="5400000" scaled="0"/>
+        </a:gradFill>
+      </a:bgFillStyleLst>
+    </a:fmtScheme>
+  </a:themeElements>
+  <a:objectDefaults>
+    <a:lnDef>
+      <a:spPr/>
+      <a:bodyPr/>
+      <a:lstStyle/>
+      <a:style>
+        <a:lnRef idx="2">
+          <a:schemeClr val="accent1"/>
+        </a:lnRef>
+        <a:fillRef idx="0">
+          <a:schemeClr val="accent1"/>
+        </a:fillRef>
+        <a:effectRef idx="1">
+          <a:schemeClr val="accent1"/>
+        </a:effectRef>
+        <a:fontRef idx="minor">
+          <a:schemeClr val="tx1"/>
+        </a:fontRef>
+      </a:style>
+    </a:lnDef>
+  </a:objectDefaults>
+  <a:extraClrSchemeLst/>
+  <a:extLst>
+    <a:ext uri="{05A4C25C-085E-4340-85A3-A5531E510DB2}">
+      <thm15:themeFamily xmlns:thm15="http://schemas.microsoft.com/office/thememl/2012/main" name="Office Theme" id="{2E142A2C-CD16-42D6-873A-C26D2A0506FA}" vid="{1BDDFF52-6CD6-40A5-AB3C-68EB2F1E4D0A}"/>
+    </a:ext>
+  </a:extLst>
+</a:theme>
 </file>